--- a/SmartInterview_Deliverables/04_Presentation_and_Defense/SmartInterview_Project_Presentation.pptx
+++ b/SmartInterview_Deliverables/04_Presentation_and_Defense/SmartInterview_Project_Presentation.pptx
@@ -16,6 +16,9 @@
     <p:sldId id="264" r:id="rId15"/>
     <p:sldId id="265" r:id="rId16"/>
     <p:sldId id="266" r:id="rId17"/>
+    <p:sldId id="267" r:id="rId18"/>
+    <p:sldId id="268" r:id="rId19"/>
+    <p:sldId id="269" r:id="rId20"/>
   </p:sldIdLst>
   <p:sldSz cx="12191695" cy="6858000" type="screen4x3"/>
   <p:notesSz cx="6858000" cy="9144000"/>
@@ -3114,7 +3117,7 @@
           <a:lstStyle/>
           <a:p>
             <a:pPr>
-              <a:defRPr sz="4000" b="1">
+              <a:defRPr sz="4200" b="1">
                 <a:solidFill>
                   <a:srgbClr val="1A365D"/>
                 </a:solidFill>
@@ -3142,7 +3145,11 @@
           <a:lstStyle/>
           <a:p>
             <a:pPr>
-              <a:defRPr sz="1800"/>
+              <a:defRPr sz="1900">
+                <a:solidFill>
+                  <a:srgbClr val="1E293B"/>
+                </a:solidFill>
+              </a:defRPr>
             </a:pPr>
             <a:r>
               <a:t>Personalized Technical Interview Preparation in Higher Education</a:t>
@@ -3150,7 +3157,32 @@
           </a:p>
           <a:p>
             <a:pPr>
-              <a:defRPr sz="1800"/>
+              <a:defRPr sz="1900">
+                <a:solidFill>
+                  <a:srgbClr val="1E293B"/>
+                </a:solidFill>
+              </a:defRPr>
+            </a:pPr>
+            <a:r>
+              <a:t>Grounding via Hybrid Graph RAG &amp; Deterministic Bloom's Scaffolding</a:t>
+            </a:r>
+          </a:p>
+          <a:p>
+            <a:pPr>
+              <a:defRPr sz="1600">
+                <a:solidFill>
+                  <a:srgbClr val="1E293B"/>
+                </a:solidFill>
+              </a:defRPr>
+            </a:pPr>
+          </a:p>
+          <a:p>
+            <a:pPr>
+              <a:defRPr sz="1600">
+                <a:solidFill>
+                  <a:srgbClr val="1E293B"/>
+                </a:solidFill>
+              </a:defRPr>
             </a:pPr>
             <a:r>
               <a:t>Team ID: Team G-1392 | Department of CSE (AI &amp; ML)</a:t>
@@ -3158,18 +3190,26 @@
           </a:p>
           <a:p>
             <a:pPr>
-              <a:defRPr sz="1800"/>
-            </a:pPr>
-            <a:r>
-              <a:t>Keshav Memorial Institute of Technology (KMIT)</a:t>
-            </a:r>
-          </a:p>
-          <a:p>
-            <a:pPr>
-              <a:defRPr sz="1800"/>
-            </a:pPr>
-            <a:r>
-              <a:t>Faculty Mentor: Dr. TVG Sridevi</a:t>
+              <a:defRPr sz="1600">
+                <a:solidFill>
+                  <a:srgbClr val="1E293B"/>
+                </a:solidFill>
+              </a:defRPr>
+            </a:pPr>
+            <a:r>
+              <a:t>Keshav Memorial Institute of Technology (KMIT), Hyderabad</a:t>
+            </a:r>
+          </a:p>
+          <a:p>
+            <a:pPr>
+              <a:defRPr sz="1600">
+                <a:solidFill>
+                  <a:srgbClr val="1E293B"/>
+                </a:solidFill>
+              </a:defRPr>
+            </a:pPr>
+            <a:r>
+              <a:t>Faculty Mentor: Dr. TVG Sridevi, Professor, CSE</a:t>
             </a:r>
           </a:p>
         </p:txBody>
@@ -3194,140 +3234,316 @@
       <p:grpSpPr/>
       <p:sp>
         <p:nvSpPr>
-          <p:cNvPr id="2" name="Title 1"/>
-          <p:cNvSpPr>
-            <a:spLocks noGrp="1"/>
-          </p:cNvSpPr>
-          <p:nvPr>
-            <p:ph type="title"/>
-          </p:nvPr>
-        </p:nvSpPr>
-        <p:spPr/>
-        <p:txBody>
-          <a:bodyPr/>
-          <a:lstStyle/>
-          <a:p>
-            <a:pPr>
-              <a:defRPr sz="2800" b="1">
+          <p:cNvPr id="2" name="TextBox 1"/>
+          <p:cNvSpPr txBox="1"/>
+          <p:nvPr/>
+        </p:nvSpPr>
+        <p:spPr>
+          <a:xfrm>
+            <a:off x="731520" y="365760"/>
+            <a:ext cx="10698480" cy="365760"/>
+          </a:xfrm>
+          <a:prstGeom prst="rect">
+            <a:avLst/>
+          </a:prstGeom>
+          <a:noFill/>
+        </p:spPr>
+        <p:txBody>
+          <a:bodyPr wrap="square">
+            <a:spAutoFit/>
+          </a:bodyPr>
+          <a:lstStyle/>
+          <a:p>
+            <a:pPr>
+              <a:defRPr sz="1000" b="1">
+                <a:solidFill>
+                  <a:srgbClr val="2563EB"/>
+                </a:solidFill>
+              </a:defRPr>
+            </a:pPr>
+            <a:r>
+              <a:t>SMARTINTERVIEW — ACADEMIC VIVA &amp; TECHNICAL DEFENSE</a:t>
+            </a:r>
+          </a:p>
+        </p:txBody>
+      </p:sp>
+      <p:sp>
+        <p:nvSpPr>
+          <p:cNvPr id="3" name="TextBox 2"/>
+          <p:cNvSpPr txBox="1"/>
+          <p:nvPr/>
+        </p:nvSpPr>
+        <p:spPr>
+          <a:xfrm>
+            <a:off x="731520" y="640080"/>
+            <a:ext cx="10698480" cy="731520"/>
+          </a:xfrm>
+          <a:prstGeom prst="rect">
+            <a:avLst/>
+          </a:prstGeom>
+          <a:noFill/>
+        </p:spPr>
+        <p:txBody>
+          <a:bodyPr wrap="square">
+            <a:spAutoFit/>
+          </a:bodyPr>
+          <a:lstStyle/>
+          <a:p>
+            <a:pPr>
+              <a:defRPr sz="2600" b="1">
                 <a:solidFill>
                   <a:srgbClr val="1A365D"/>
                 </a:solidFill>
               </a:defRPr>
             </a:pPr>
             <a:r>
-              <a:t>System Verification &amp; Test Matrix</a:t>
-            </a:r>
-          </a:p>
-        </p:txBody>
-      </p:sp>
-      <p:sp>
-        <p:nvSpPr>
-          <p:cNvPr id="3" name="Content Placeholder 2"/>
-          <p:cNvSpPr>
-            <a:spLocks noGrp="1"/>
-          </p:cNvSpPr>
-          <p:nvPr>
-            <p:ph idx="1"/>
-          </p:nvPr>
-        </p:nvSpPr>
-        <p:spPr/>
-        <p:txBody>
-          <a:bodyPr wrap="square"/>
-          <a:lstStyle/>
-          <a:p>
-            <a:pPr>
-              <a:spcAft>
-                <a:spcPts val="800"/>
-              </a:spcAft>
-              <a:defRPr b="1" sz="1800">
-                <a:solidFill>
-                  <a:srgbClr val="2B6CB0"/>
-                </a:solidFill>
-              </a:defRPr>
-            </a:pPr>
-            <a:r>
-              <a:t>Validated across 7 formal test cases (TC-01 through TC-07):</a:t>
-            </a:r>
-          </a:p>
-          <a:p>
-            <a:pPr>
-              <a:spcAft>
-                <a:spcPts val="600"/>
-              </a:spcAft>
-              <a:defRPr sz="1700"/>
-            </a:pPr>
-            <a:r>
-              <a:t>• TC-01 (Auth): Duplicate user registration rejected (HTTP 400) — PASSED</a:t>
-            </a:r>
-          </a:p>
-          <a:p>
-            <a:pPr>
-              <a:spcAft>
-                <a:spcPts val="600"/>
-              </a:spcAft>
-              <a:defRPr sz="1700"/>
-            </a:pPr>
-            <a:r>
-              <a:t>• TC-02 (Parsing): Invalid/corrupt file upload rejected (HTTP 400) — PASSED</a:t>
-            </a:r>
-          </a:p>
-          <a:p>
-            <a:pPr>
-              <a:spcAft>
-                <a:spcPts val="600"/>
-              </a:spcAft>
-              <a:defRPr sz="1700"/>
-            </a:pPr>
-            <a:r>
-              <a:t>• TC-03 (RAG Retrieval): Top-3 context returned in 24.6ms (&lt;= 100ms bound) — PASSED</a:t>
-            </a:r>
-          </a:p>
-          <a:p>
-            <a:pPr>
-              <a:spcAft>
-                <a:spcPts val="600"/>
-              </a:spcAft>
-              <a:defRPr sz="1700"/>
-            </a:pPr>
-            <a:r>
-              <a:t>• TC-04 (Adaptive Escalation): Score &gt;= 80% advances Bloom level (+1) — PASSED</a:t>
-            </a:r>
-          </a:p>
-          <a:p>
-            <a:pPr>
-              <a:spcAft>
-                <a:spcPts val="600"/>
-              </a:spcAft>
-              <a:defRPr sz="1700"/>
-            </a:pPr>
-            <a:r>
-              <a:t>• TC-05 (Adaptive Remediation): Score &lt; 50% regresses Bloom level (-1) — PASSED</a:t>
-            </a:r>
-          </a:p>
-          <a:p>
-            <a:pPr>
-              <a:spcAft>
-                <a:spcPts val="600"/>
-              </a:spcAft>
-              <a:defRPr sz="1700"/>
-            </a:pPr>
-            <a:r>
-              <a:t>• TC-06 (Neural Voice): In-memory TTS byte stream generated in &lt;= 1.2s — PASSED</a:t>
-            </a:r>
-          </a:p>
-          <a:p>
-            <a:pPr>
-              <a:spcAft>
-                <a:spcPts val="600"/>
-              </a:spcAft>
-              <a:defRPr sz="1700"/>
-            </a:pPr>
-            <a:r>
-              <a:t>• TC-07 (Rubric Determinism): 5-factor scoring formula convergence — PASSED</a:t>
-            </a:r>
-          </a:p>
-        </p:txBody>
-      </p:sp>
+              <a:t>Live Spoken Interview Room &amp; Voice Architecture</a:t>
+            </a:r>
+          </a:p>
+        </p:txBody>
+      </p:sp>
+      <p:sp>
+        <p:nvSpPr>
+          <p:cNvPr id="4" name="TextBox 3"/>
+          <p:cNvSpPr txBox="1"/>
+          <p:nvPr/>
+        </p:nvSpPr>
+        <p:spPr>
+          <a:xfrm>
+            <a:off x="731520" y="1371600"/>
+            <a:ext cx="5303520" cy="5029200"/>
+          </a:xfrm>
+          <a:prstGeom prst="rect">
+            <a:avLst/>
+          </a:prstGeom>
+          <a:noFill/>
+        </p:spPr>
+        <p:txBody>
+          <a:bodyPr wrap="square">
+            <a:spAutoFit/>
+          </a:bodyPr>
+          <a:lstStyle/>
+          <a:p>
+            <a:pPr>
+              <a:spcAft>
+                <a:spcPts val="600"/>
+              </a:spcAft>
+              <a:defRPr b="1" sz="1600">
+                <a:solidFill>
+                  <a:srgbClr val="2563EB"/>
+                </a:solidFill>
+              </a:defRPr>
+            </a:pPr>
+            <a:r>
+              <a:t>Real-Time Two-Way Conversational Dialogue:</a:t>
+            </a:r>
+          </a:p>
+          <a:p>
+            <a:pPr>
+              <a:spcAft>
+                <a:spcPts val="600"/>
+              </a:spcAft>
+              <a:defRPr sz="1500">
+                <a:solidFill>
+                  <a:srgbClr val="1E293B"/>
+                </a:solidFill>
+              </a:defRPr>
+            </a:pPr>
+            <a:r>
+              <a:t>• Text-to-Speech (Microsoft Edge-TTS):</a:t>
+            </a:r>
+          </a:p>
+          <a:p>
+            <a:pPr lvl="1">
+              <a:spcAft>
+                <a:spcPts val="400"/>
+              </a:spcAft>
+              <a:defRPr sz="1300">
+                <a:solidFill>
+                  <a:srgbClr val="1E293B"/>
+                </a:solidFill>
+              </a:defRPr>
+            </a:pPr>
+            <a:r>
+              <a:t>- High-fidelity en-US-ChristopherNeural voice profile.</a:t>
+            </a:r>
+          </a:p>
+          <a:p>
+            <a:pPr lvl="1">
+              <a:spcAft>
+                <a:spcPts val="400"/>
+              </a:spcAft>
+              <a:defRPr sz="1300">
+                <a:solidFill>
+                  <a:srgbClr val="1E293B"/>
+                </a:solidFill>
+              </a:defRPr>
+            </a:pPr>
+            <a:r>
+              <a:t>- Synthesized directly into in-memory io.BytesIO buffers.</a:t>
+            </a:r>
+          </a:p>
+          <a:p>
+            <a:pPr lvl="1">
+              <a:spcAft>
+                <a:spcPts val="400"/>
+              </a:spcAft>
+              <a:defRPr sz="1300">
+                <a:solidFill>
+                  <a:srgbClr val="1E293B"/>
+                </a:solidFill>
+              </a:defRPr>
+            </a:pPr>
+            <a:r>
+              <a:t>- Audio generation latency &lt;= 1.2 seconds (zero disk overhead).</a:t>
+            </a:r>
+          </a:p>
+          <a:p>
+            <a:pPr>
+              <a:spcAft>
+                <a:spcPts val="600"/>
+              </a:spcAft>
+              <a:defRPr sz="1500">
+                <a:solidFill>
+                  <a:srgbClr val="1E293B"/>
+                </a:solidFill>
+              </a:defRPr>
+            </a:pPr>
+            <a:r>
+              <a:t>• Speech-to-Text (Groq Whisper Large-v3):</a:t>
+            </a:r>
+          </a:p>
+          <a:p>
+            <a:pPr lvl="1">
+              <a:spcAft>
+                <a:spcPts val="400"/>
+              </a:spcAft>
+              <a:defRPr sz="1300">
+                <a:solidFill>
+                  <a:srgbClr val="1E293B"/>
+                </a:solidFill>
+              </a:defRPr>
+            </a:pPr>
+            <a:r>
+              <a:t>- High-accuracy neural speech transcription.</a:t>
+            </a:r>
+          </a:p>
+          <a:p>
+            <a:pPr lvl="1">
+              <a:spcAft>
+                <a:spcPts val="400"/>
+              </a:spcAft>
+              <a:defRPr sz="1300">
+                <a:solidFill>
+                  <a:srgbClr val="1E293B"/>
+                </a:solidFill>
+              </a:defRPr>
+            </a:pPr>
+            <a:r>
+              <a:t>- Prompt-biased with CS technical terminology.</a:t>
+            </a:r>
+          </a:p>
+          <a:p>
+            <a:pPr>
+              <a:spcAft>
+                <a:spcPts val="600"/>
+              </a:spcAft>
+              <a:defRPr sz="1500">
+                <a:solidFill>
+                  <a:srgbClr val="1E293B"/>
+                </a:solidFill>
+              </a:defRPr>
+            </a:pPr>
+            <a:r>
+              <a:t>• Interactive Visual Interface:</a:t>
+            </a:r>
+          </a:p>
+          <a:p>
+            <a:pPr lvl="1">
+              <a:spcAft>
+                <a:spcPts val="400"/>
+              </a:spcAft>
+              <a:defRPr sz="1300">
+                <a:solidFill>
+                  <a:srgbClr val="1E293B"/>
+                </a:solidFill>
+              </a:defRPr>
+            </a:pPr>
+            <a:r>
+              <a:t>- Current Bloom cognitive level tag (e.g., 'Analyze' Level 4).</a:t>
+            </a:r>
+          </a:p>
+          <a:p>
+            <a:pPr lvl="1">
+              <a:spcAft>
+                <a:spcPts val="400"/>
+              </a:spcAft>
+              <a:defRPr sz="1300">
+                <a:solidFill>
+                  <a:srgbClr val="1E293B"/>
+                </a:solidFill>
+              </a:defRPr>
+            </a:pPr>
+            <a:r>
+              <a:t>- Real-time speech recognition status &amp; audio controls.</a:t>
+            </a:r>
+          </a:p>
+          <a:p>
+            <a:pPr lvl="1">
+              <a:spcAft>
+                <a:spcPts val="400"/>
+              </a:spcAft>
+              <a:defRPr sz="1300">
+                <a:solidFill>
+                  <a:srgbClr val="1E293B"/>
+                </a:solidFill>
+              </a:defRPr>
+            </a:pPr>
+            <a:r>
+              <a:t>- Fallback text input for accessibility and quiet environments.</a:t>
+            </a:r>
+          </a:p>
+          <a:p>
+            <a:pPr lvl="1">
+              <a:spcAft>
+                <a:spcPts val="400"/>
+              </a:spcAft>
+              <a:defRPr sz="1300">
+                <a:solidFill>
+                  <a:srgbClr val="1E293B"/>
+                </a:solidFill>
+              </a:defRPr>
+            </a:pPr>
+            <a:r>
+              <a:t>- Sub-2.5s end-to-end conversational turnaround.</a:t>
+            </a:r>
+          </a:p>
+        </p:txBody>
+      </p:sp>
+      <p:pic>
+        <p:nvPicPr>
+          <p:cNvPr id="5" name="Picture 4" descr="13_live_interview_session.png"/>
+          <p:cNvPicPr>
+            <a:picLocks noChangeAspect="1"/>
+          </p:cNvPicPr>
+          <p:nvPr/>
+        </p:nvPicPr>
+        <p:blipFill>
+          <a:blip r:embed="rId2"/>
+          <a:stretch>
+            <a:fillRect/>
+          </a:stretch>
+        </p:blipFill>
+        <p:spPr>
+          <a:xfrm>
+            <a:off x="6217920" y="1645920"/>
+            <a:ext cx="5486400" cy="3429000"/>
+          </a:xfrm>
+          <a:prstGeom prst="rect">
+            <a:avLst/>
+          </a:prstGeom>
+        </p:spPr>
+      </p:pic>
     </p:spTree>
   </p:cSld>
   <p:clrMapOvr>
@@ -3348,6 +3564,927 @@
       <p:grpSpPr/>
       <p:sp>
         <p:nvSpPr>
+          <p:cNvPr id="2" name="TextBox 1"/>
+          <p:cNvSpPr txBox="1"/>
+          <p:nvPr/>
+        </p:nvSpPr>
+        <p:spPr>
+          <a:xfrm>
+            <a:off x="731520" y="365760"/>
+            <a:ext cx="10698480" cy="365760"/>
+          </a:xfrm>
+          <a:prstGeom prst="rect">
+            <a:avLst/>
+          </a:prstGeom>
+          <a:noFill/>
+        </p:spPr>
+        <p:txBody>
+          <a:bodyPr wrap="square">
+            <a:spAutoFit/>
+          </a:bodyPr>
+          <a:lstStyle/>
+          <a:p>
+            <a:pPr>
+              <a:defRPr sz="1000" b="1">
+                <a:solidFill>
+                  <a:srgbClr val="2563EB"/>
+                </a:solidFill>
+              </a:defRPr>
+            </a:pPr>
+            <a:r>
+              <a:t>SMARTINTERVIEW — ACADEMIC VIVA &amp; TECHNICAL DEFENSE</a:t>
+            </a:r>
+          </a:p>
+        </p:txBody>
+      </p:sp>
+      <p:sp>
+        <p:nvSpPr>
+          <p:cNvPr id="3" name="TextBox 2"/>
+          <p:cNvSpPr txBox="1"/>
+          <p:nvPr/>
+        </p:nvSpPr>
+        <p:spPr>
+          <a:xfrm>
+            <a:off x="731520" y="640080"/>
+            <a:ext cx="10698480" cy="731520"/>
+          </a:xfrm>
+          <a:prstGeom prst="rect">
+            <a:avLst/>
+          </a:prstGeom>
+          <a:noFill/>
+        </p:spPr>
+        <p:txBody>
+          <a:bodyPr wrap="square">
+            <a:spAutoFit/>
+          </a:bodyPr>
+          <a:lstStyle/>
+          <a:p>
+            <a:pPr>
+              <a:defRPr sz="2600" b="1">
+                <a:solidFill>
+                  <a:srgbClr val="1A365D"/>
+                </a:solidFill>
+              </a:defRPr>
+            </a:pPr>
+            <a:r>
+              <a:t>Comprehensive Results Scorecard &amp; Analytics</a:t>
+            </a:r>
+          </a:p>
+        </p:txBody>
+      </p:sp>
+      <p:sp>
+        <p:nvSpPr>
+          <p:cNvPr id="4" name="TextBox 3"/>
+          <p:cNvSpPr txBox="1"/>
+          <p:nvPr/>
+        </p:nvSpPr>
+        <p:spPr>
+          <a:xfrm>
+            <a:off x="731520" y="1371600"/>
+            <a:ext cx="5303520" cy="5029200"/>
+          </a:xfrm>
+          <a:prstGeom prst="rect">
+            <a:avLst/>
+          </a:prstGeom>
+          <a:noFill/>
+        </p:spPr>
+        <p:txBody>
+          <a:bodyPr wrap="square">
+            <a:spAutoFit/>
+          </a:bodyPr>
+          <a:lstStyle/>
+          <a:p>
+            <a:pPr>
+              <a:spcAft>
+                <a:spcPts val="600"/>
+              </a:spcAft>
+              <a:defRPr b="1" sz="1600">
+                <a:solidFill>
+                  <a:srgbClr val="2563EB"/>
+                </a:solidFill>
+              </a:defRPr>
+            </a:pPr>
+            <a:r>
+              <a:t>Multi-Dimensional Candidate Feedback:</a:t>
+            </a:r>
+          </a:p>
+          <a:p>
+            <a:pPr>
+              <a:spcAft>
+                <a:spcPts val="600"/>
+              </a:spcAft>
+              <a:defRPr sz="1500">
+                <a:solidFill>
+                  <a:srgbClr val="1E293B"/>
+                </a:solidFill>
+              </a:defRPr>
+            </a:pPr>
+            <a:r>
+              <a:t>• Overall Session Score &amp; Performance Tier:</a:t>
+            </a:r>
+          </a:p>
+          <a:p>
+            <a:pPr lvl="1">
+              <a:spcAft>
+                <a:spcPts val="400"/>
+              </a:spcAft>
+              <a:defRPr sz="1300">
+                <a:solidFill>
+                  <a:srgbClr val="1E293B"/>
+                </a:solidFill>
+              </a:defRPr>
+            </a:pPr>
+            <a:r>
+              <a:t>- Overall percentage with Bloom cognitive depth indicators.</a:t>
+            </a:r>
+          </a:p>
+          <a:p>
+            <a:pPr>
+              <a:spcAft>
+                <a:spcPts val="600"/>
+              </a:spcAft>
+              <a:defRPr sz="1500">
+                <a:solidFill>
+                  <a:srgbClr val="1E293B"/>
+                </a:solidFill>
+              </a:defRPr>
+            </a:pPr>
+            <a:r>
+              <a:t>• 5-Axis Radar Breakdown Chart:</a:t>
+            </a:r>
+          </a:p>
+          <a:p>
+            <a:pPr lvl="1">
+              <a:spcAft>
+                <a:spcPts val="400"/>
+              </a:spcAft>
+              <a:defRPr sz="1300">
+                <a:solidFill>
+                  <a:srgbClr val="1E293B"/>
+                </a:solidFill>
+              </a:defRPr>
+            </a:pPr>
+            <a:r>
+              <a:t>- Correctness, Completeness, Relevance, Semantic, Concept Coverage.</a:t>
+            </a:r>
+          </a:p>
+          <a:p>
+            <a:pPr>
+              <a:spcAft>
+                <a:spcPts val="600"/>
+              </a:spcAft>
+              <a:defRPr sz="1500">
+                <a:solidFill>
+                  <a:srgbClr val="1E293B"/>
+                </a:solidFill>
+              </a:defRPr>
+            </a:pPr>
+            <a:r>
+              <a:t>• Question-by-Question Granular Transcripts:</a:t>
+            </a:r>
+          </a:p>
+          <a:p>
+            <a:pPr lvl="1">
+              <a:spcAft>
+                <a:spcPts val="400"/>
+              </a:spcAft>
+              <a:defRPr sz="1300">
+                <a:solidFill>
+                  <a:srgbClr val="1E293B"/>
+                </a:solidFill>
+              </a:defRPr>
+            </a:pPr>
+            <a:r>
+              <a:t>- Candidate response vs. ground truth reference context.</a:t>
+            </a:r>
+          </a:p>
+          <a:p>
+            <a:pPr lvl="1">
+              <a:spcAft>
+                <a:spcPts val="400"/>
+              </a:spcAft>
+              <a:defRPr sz="1300">
+                <a:solidFill>
+                  <a:srgbClr val="1E293B"/>
+                </a:solidFill>
+              </a:defRPr>
+            </a:pPr>
+            <a:r>
+              <a:t>- Concrete technical strengths and identified gaps.</a:t>
+            </a:r>
+          </a:p>
+          <a:p>
+            <a:pPr>
+              <a:spcAft>
+                <a:spcPts val="600"/>
+              </a:spcAft>
+              <a:defRPr sz="1500">
+                <a:solidFill>
+                  <a:srgbClr val="1E293B"/>
+                </a:solidFill>
+              </a:defRPr>
+            </a:pPr>
+            <a:r>
+              <a:t>• Actionable Recommendations:</a:t>
+            </a:r>
+          </a:p>
+          <a:p>
+            <a:pPr lvl="1">
+              <a:spcAft>
+                <a:spcPts val="400"/>
+              </a:spcAft>
+              <a:defRPr sz="1300">
+                <a:solidFill>
+                  <a:srgbClr val="1E293B"/>
+                </a:solidFill>
+              </a:defRPr>
+            </a:pPr>
+            <a:r>
+              <a:t>- AI-curated study priorities tagged by urgency.</a:t>
+            </a:r>
+          </a:p>
+          <a:p>
+            <a:pPr>
+              <a:spcAft>
+                <a:spcPts val="600"/>
+              </a:spcAft>
+              <a:defRPr sz="1500">
+                <a:solidFill>
+                  <a:srgbClr val="1E293B"/>
+                </a:solidFill>
+              </a:defRPr>
+            </a:pPr>
+            <a:r>
+              <a:t>• Automated PDF Export:</a:t>
+            </a:r>
+          </a:p>
+          <a:p>
+            <a:pPr lvl="1">
+              <a:spcAft>
+                <a:spcPts val="400"/>
+              </a:spcAft>
+              <a:defRPr sz="1300">
+                <a:solidFill>
+                  <a:srgbClr val="1E293B"/>
+                </a:solidFill>
+              </a:defRPr>
+            </a:pPr>
+            <a:r>
+              <a:t>- 1-click downloadable formal technical evaluation report.</a:t>
+            </a:r>
+          </a:p>
+        </p:txBody>
+      </p:sp>
+      <p:pic>
+        <p:nvPicPr>
+          <p:cNvPr id="5" name="Picture 4" descr="11_results_scorecard.png"/>
+          <p:cNvPicPr>
+            <a:picLocks noChangeAspect="1"/>
+          </p:cNvPicPr>
+          <p:nvPr/>
+        </p:nvPicPr>
+        <p:blipFill>
+          <a:blip r:embed="rId2"/>
+          <a:stretch>
+            <a:fillRect/>
+          </a:stretch>
+        </p:blipFill>
+        <p:spPr>
+          <a:xfrm>
+            <a:off x="6217920" y="1645920"/>
+            <a:ext cx="5486400" cy="3429000"/>
+          </a:xfrm>
+          <a:prstGeom prst="rect">
+            <a:avLst/>
+          </a:prstGeom>
+        </p:spPr>
+      </p:pic>
+    </p:spTree>
+  </p:cSld>
+  <p:clrMapOvr>
+    <a:masterClrMapping/>
+  </p:clrMapOvr>
+</p:sld>
+</file>
+
+<file path=ppt/slides/slide12.xml><?xml version="1.0" encoding="utf-8"?>
+<p:sld xmlns:a="http://schemas.openxmlformats.org/drawingml/2006/main" xmlns:p="http://schemas.openxmlformats.org/presentationml/2006/main" xmlns:r="http://schemas.openxmlformats.org/officeDocument/2006/relationships">
+  <p:cSld>
+    <p:spTree>
+      <p:nvGrpSpPr>
+        <p:cNvPr id="1" name=""/>
+        <p:cNvGrpSpPr/>
+        <p:nvPr/>
+      </p:nvGrpSpPr>
+      <p:grpSpPr/>
+      <p:sp>
+        <p:nvSpPr>
+          <p:cNvPr id="2" name="TextBox 1"/>
+          <p:cNvSpPr txBox="1"/>
+          <p:nvPr/>
+        </p:nvSpPr>
+        <p:spPr>
+          <a:xfrm>
+            <a:off x="731520" y="365760"/>
+            <a:ext cx="10698480" cy="365760"/>
+          </a:xfrm>
+          <a:prstGeom prst="rect">
+            <a:avLst/>
+          </a:prstGeom>
+          <a:noFill/>
+        </p:spPr>
+        <p:txBody>
+          <a:bodyPr wrap="square">
+            <a:spAutoFit/>
+          </a:bodyPr>
+          <a:lstStyle/>
+          <a:p>
+            <a:pPr>
+              <a:defRPr sz="1000" b="1">
+                <a:solidFill>
+                  <a:srgbClr val="2563EB"/>
+                </a:solidFill>
+              </a:defRPr>
+            </a:pPr>
+            <a:r>
+              <a:t>SMARTINTERVIEW — ACADEMIC VIVA &amp; TECHNICAL DEFENSE</a:t>
+            </a:r>
+          </a:p>
+        </p:txBody>
+      </p:sp>
+      <p:sp>
+        <p:nvSpPr>
+          <p:cNvPr id="3" name="TextBox 2"/>
+          <p:cNvSpPr txBox="1"/>
+          <p:nvPr/>
+        </p:nvSpPr>
+        <p:spPr>
+          <a:xfrm>
+            <a:off x="731520" y="640080"/>
+            <a:ext cx="10698480" cy="731520"/>
+          </a:xfrm>
+          <a:prstGeom prst="rect">
+            <a:avLst/>
+          </a:prstGeom>
+          <a:noFill/>
+        </p:spPr>
+        <p:txBody>
+          <a:bodyPr wrap="square">
+            <a:spAutoFit/>
+          </a:bodyPr>
+          <a:lstStyle/>
+          <a:p>
+            <a:pPr>
+              <a:defRPr sz="2600" b="1">
+                <a:solidFill>
+                  <a:srgbClr val="1A365D"/>
+                </a:solidFill>
+              </a:defRPr>
+            </a:pPr>
+            <a:r>
+              <a:t>Remedial Mastery Mode: Turning Gaps into Strengths</a:t>
+            </a:r>
+          </a:p>
+        </p:txBody>
+      </p:sp>
+      <p:sp>
+        <p:nvSpPr>
+          <p:cNvPr id="4" name="TextBox 3"/>
+          <p:cNvSpPr txBox="1"/>
+          <p:nvPr/>
+        </p:nvSpPr>
+        <p:spPr>
+          <a:xfrm>
+            <a:off x="731520" y="1371600"/>
+            <a:ext cx="5303520" cy="5029200"/>
+          </a:xfrm>
+          <a:prstGeom prst="rect">
+            <a:avLst/>
+          </a:prstGeom>
+          <a:noFill/>
+        </p:spPr>
+        <p:txBody>
+          <a:bodyPr wrap="square">
+            <a:spAutoFit/>
+          </a:bodyPr>
+          <a:lstStyle/>
+          <a:p>
+            <a:pPr>
+              <a:spcAft>
+                <a:spcPts val="600"/>
+              </a:spcAft>
+              <a:defRPr b="1" sz="1600">
+                <a:solidFill>
+                  <a:srgbClr val="2563EB"/>
+                </a:solidFill>
+              </a:defRPr>
+            </a:pPr>
+            <a:r>
+              <a:t>From Evaluation to Accelerated Upskilling:</a:t>
+            </a:r>
+          </a:p>
+          <a:p>
+            <a:pPr>
+              <a:spcAft>
+                <a:spcPts val="600"/>
+              </a:spcAft>
+              <a:defRPr sz="1500">
+                <a:solidFill>
+                  <a:srgbClr val="1E293B"/>
+                </a:solidFill>
+              </a:defRPr>
+            </a:pPr>
+            <a:r>
+              <a:t>• Root-Cause Knowledge Graph Traversal:</a:t>
+            </a:r>
+          </a:p>
+          <a:p>
+            <a:pPr lvl="1">
+              <a:spcAft>
+                <a:spcPts val="400"/>
+              </a:spcAft>
+              <a:defRPr sz="1300">
+                <a:solidFill>
+                  <a:srgbClr val="1E293B"/>
+                </a:solidFill>
+              </a:defRPr>
+            </a:pPr>
+            <a:r>
+              <a:t>- When candidate scores &lt; 50%, engine queries NetworkX graph for missing prerequisite concepts.</a:t>
+            </a:r>
+          </a:p>
+          <a:p>
+            <a:pPr>
+              <a:spcAft>
+                <a:spcPts val="600"/>
+              </a:spcAft>
+              <a:defRPr sz="1500">
+                <a:solidFill>
+                  <a:srgbClr val="1E293B"/>
+                </a:solidFill>
+              </a:defRPr>
+            </a:pPr>
+            <a:r>
+              <a:t>• Automated AI Curriculum &amp; Study Guide Synthesis:</a:t>
+            </a:r>
+          </a:p>
+          <a:p>
+            <a:pPr lvl="1">
+              <a:spcAft>
+                <a:spcPts val="400"/>
+              </a:spcAft>
+              <a:defRPr sz="1300">
+                <a:solidFill>
+                  <a:srgbClr val="1E293B"/>
+                </a:solidFill>
+              </a:defRPr>
+            </a:pPr>
+            <a:r>
+              <a:t>- Generates high-yield study notes, core concepts, and 'where candidates typically lose marks'.</a:t>
+            </a:r>
+          </a:p>
+          <a:p>
+            <a:pPr>
+              <a:spcAft>
+                <a:spcPts val="600"/>
+              </a:spcAft>
+              <a:defRPr sz="1500">
+                <a:solidFill>
+                  <a:srgbClr val="1E293B"/>
+                </a:solidFill>
+              </a:defRPr>
+            </a:pPr>
+            <a:r>
+              <a:t>• Isolated Prerequisite Knowledge Chunks:</a:t>
+            </a:r>
+          </a:p>
+          <a:p>
+            <a:pPr lvl="1">
+              <a:spcAft>
+                <a:spcPts val="400"/>
+              </a:spcAft>
+              <a:defRPr sz="1300">
+                <a:solidFill>
+                  <a:srgbClr val="1E293B"/>
+                </a:solidFill>
+              </a:defRPr>
+            </a:pPr>
+            <a:r>
+              <a:t>- Retrieves exact textbook references for targeted review.</a:t>
+            </a:r>
+          </a:p>
+          <a:p>
+            <a:pPr>
+              <a:spcAft>
+                <a:spcPts val="600"/>
+              </a:spcAft>
+              <a:defRPr sz="1500">
+                <a:solidFill>
+                  <a:srgbClr val="1E293B"/>
+                </a:solidFill>
+              </a:defRPr>
+            </a:pPr>
+            <a:r>
+              <a:t>• 1-Click Focused Retest Workflow:</a:t>
+            </a:r>
+          </a:p>
+          <a:p>
+            <a:pPr lvl="1">
+              <a:spcAft>
+                <a:spcPts val="400"/>
+              </a:spcAft>
+              <a:defRPr sz="1300">
+                <a:solidFill>
+                  <a:srgbClr val="1E293B"/>
+                </a:solidFill>
+              </a:defRPr>
+            </a:pPr>
+            <a:r>
+              <a:t>- Candidates can immediately launch a focused mock interview on their weakest topics.</a:t>
+            </a:r>
+          </a:p>
+          <a:p>
+            <a:pPr lvl="1">
+              <a:spcAft>
+                <a:spcPts val="400"/>
+              </a:spcAft>
+              <a:defRPr sz="1300">
+                <a:solidFill>
+                  <a:srgbClr val="1E293B"/>
+                </a:solidFill>
+              </a:defRPr>
+            </a:pPr>
+            <a:r>
+              <a:t>- Progress is re-assessed to track score recovery.</a:t>
+            </a:r>
+          </a:p>
+        </p:txBody>
+      </p:sp>
+      <p:pic>
+        <p:nvPicPr>
+          <p:cNvPr id="5" name="Picture 4" descr="12_remedial_mastery_mode.png"/>
+          <p:cNvPicPr>
+            <a:picLocks noChangeAspect="1"/>
+          </p:cNvPicPr>
+          <p:nvPr/>
+        </p:nvPicPr>
+        <p:blipFill>
+          <a:blip r:embed="rId2"/>
+          <a:stretch>
+            <a:fillRect/>
+          </a:stretch>
+        </p:blipFill>
+        <p:spPr>
+          <a:xfrm>
+            <a:off x="6217920" y="1645920"/>
+            <a:ext cx="5486400" cy="3429000"/>
+          </a:xfrm>
+          <a:prstGeom prst="rect">
+            <a:avLst/>
+          </a:prstGeom>
+        </p:spPr>
+      </p:pic>
+    </p:spTree>
+  </p:cSld>
+  <p:clrMapOvr>
+    <a:masterClrMapping/>
+  </p:clrMapOvr>
+</p:sld>
+</file>
+
+<file path=ppt/slides/slide13.xml><?xml version="1.0" encoding="utf-8"?>
+<p:sld xmlns:a="http://schemas.openxmlformats.org/drawingml/2006/main" xmlns:p="http://schemas.openxmlformats.org/presentationml/2006/main" xmlns:r="http://schemas.openxmlformats.org/officeDocument/2006/relationships">
+  <p:cSld>
+    <p:spTree>
+      <p:nvGrpSpPr>
+        <p:cNvPr id="1" name=""/>
+        <p:cNvGrpSpPr/>
+        <p:nvPr/>
+      </p:nvGrpSpPr>
+      <p:grpSpPr/>
+      <p:sp>
+        <p:nvSpPr>
+          <p:cNvPr id="2" name="TextBox 1"/>
+          <p:cNvSpPr txBox="1"/>
+          <p:nvPr/>
+        </p:nvSpPr>
+        <p:spPr>
+          <a:xfrm>
+            <a:off x="731520" y="365760"/>
+            <a:ext cx="10698480" cy="365760"/>
+          </a:xfrm>
+          <a:prstGeom prst="rect">
+            <a:avLst/>
+          </a:prstGeom>
+          <a:noFill/>
+        </p:spPr>
+        <p:txBody>
+          <a:bodyPr wrap="square">
+            <a:spAutoFit/>
+          </a:bodyPr>
+          <a:lstStyle/>
+          <a:p>
+            <a:pPr>
+              <a:defRPr sz="1000" b="1">
+                <a:solidFill>
+                  <a:srgbClr val="2563EB"/>
+                </a:solidFill>
+              </a:defRPr>
+            </a:pPr>
+            <a:r>
+              <a:t>SMARTINTERVIEW — ACADEMIC VIVA &amp; TECHNICAL DEFENSE</a:t>
+            </a:r>
+          </a:p>
+        </p:txBody>
+      </p:sp>
+      <p:sp>
+        <p:nvSpPr>
+          <p:cNvPr id="3" name="TextBox 2"/>
+          <p:cNvSpPr txBox="1"/>
+          <p:nvPr/>
+        </p:nvSpPr>
+        <p:spPr>
+          <a:xfrm>
+            <a:off x="731520" y="640080"/>
+            <a:ext cx="10698480" cy="731520"/>
+          </a:xfrm>
+          <a:prstGeom prst="rect">
+            <a:avLst/>
+          </a:prstGeom>
+          <a:noFill/>
+        </p:spPr>
+        <p:txBody>
+          <a:bodyPr wrap="square">
+            <a:spAutoFit/>
+          </a:bodyPr>
+          <a:lstStyle/>
+          <a:p>
+            <a:pPr>
+              <a:defRPr sz="2600" b="1">
+                <a:solidFill>
+                  <a:srgbClr val="1A365D"/>
+                </a:solidFill>
+              </a:defRPr>
+            </a:pPr>
+            <a:r>
+              <a:t>System Verification: 355-Test Matrix (100% Passing)</a:t>
+            </a:r>
+          </a:p>
+        </p:txBody>
+      </p:sp>
+      <p:sp>
+        <p:nvSpPr>
+          <p:cNvPr id="4" name="TextBox 3"/>
+          <p:cNvSpPr txBox="1"/>
+          <p:nvPr/>
+        </p:nvSpPr>
+        <p:spPr>
+          <a:xfrm>
+            <a:off x="731520" y="1371600"/>
+            <a:ext cx="10698480" cy="5029200"/>
+          </a:xfrm>
+          <a:prstGeom prst="rect">
+            <a:avLst/>
+          </a:prstGeom>
+          <a:noFill/>
+        </p:spPr>
+        <p:txBody>
+          <a:bodyPr wrap="square">
+            <a:spAutoFit/>
+          </a:bodyPr>
+          <a:lstStyle/>
+          <a:p>
+            <a:pPr>
+              <a:spcAft>
+                <a:spcPts val="600"/>
+              </a:spcAft>
+              <a:defRPr b="1" sz="1600">
+                <a:solidFill>
+                  <a:srgbClr val="2563EB"/>
+                </a:solidFill>
+              </a:defRPr>
+            </a:pPr>
+            <a:r>
+              <a:t>Exhaustive Test Coverage Across All 18 Engineering Phases:</a:t>
+            </a:r>
+          </a:p>
+          <a:p>
+            <a:pPr>
+              <a:spcAft>
+                <a:spcPts val="600"/>
+              </a:spcAft>
+              <a:defRPr sz="1500">
+                <a:solidFill>
+                  <a:srgbClr val="1E293B"/>
+                </a:solidFill>
+              </a:defRPr>
+            </a:pPr>
+            <a:r>
+              <a:t>• 355 Total Automated Unit, Integration &amp; Validation Tests (87.90s execution, 100% Pass Rate):</a:t>
+            </a:r>
+          </a:p>
+          <a:p>
+            <a:pPr lvl="1">
+              <a:spcAft>
+                <a:spcPts val="400"/>
+              </a:spcAft>
+              <a:defRPr sz="1300">
+                <a:solidFill>
+                  <a:srgbClr val="1E293B"/>
+                </a:solidFill>
+              </a:defRPr>
+            </a:pPr>
+            <a:r>
+              <a:t>- Phase 1: Dense Vector RAG Baseline &amp; S-BERT embeddings (25 tests)</a:t>
+            </a:r>
+          </a:p>
+          <a:p>
+            <a:pPr lvl="1">
+              <a:spcAft>
+                <a:spcPts val="400"/>
+              </a:spcAft>
+              <a:defRPr sz="1300">
+                <a:solidFill>
+                  <a:srgbClr val="1E293B"/>
+                </a:solidFill>
+              </a:defRPr>
+            </a:pPr>
+            <a:r>
+              <a:t>- Phase 2-4: Knowledge Graph Schema, Builder, Storage &amp; Canonical Chunk Resolution (69 tests)</a:t>
+            </a:r>
+          </a:p>
+          <a:p>
+            <a:pPr lvl="1">
+              <a:spcAft>
+                <a:spcPts val="400"/>
+              </a:spcAft>
+              <a:defRPr sz="1300">
+                <a:solidFill>
+                  <a:srgbClr val="1E293B"/>
+                </a:solidFill>
+              </a:defRPr>
+            </a:pPr>
+            <a:r>
+              <a:t>- Phase 5: BM25 Lexical Keyword Retrieval Engine &amp; Tokenization (34 tests)</a:t>
+            </a:r>
+          </a:p>
+          <a:p>
+            <a:pPr lvl="1">
+              <a:spcAft>
+                <a:spcPts val="400"/>
+              </a:spcAft>
+              <a:defRPr sz="1300">
+                <a:solidFill>
+                  <a:srgbClr val="1E293B"/>
+                </a:solidFill>
+              </a:defRPr>
+            </a:pPr>
+            <a:r>
+              <a:t>- Phase 6-7: Graph Traversal Retrieval &amp; Hybrid Reciprocal Rank Fusion (48 tests)</a:t>
+            </a:r>
+          </a:p>
+          <a:p>
+            <a:pPr lvl="1">
+              <a:spcAft>
+                <a:spcPts val="400"/>
+              </a:spcAft>
+              <a:defRPr sz="1300">
+                <a:solidFill>
+                  <a:srgbClr val="1E293B"/>
+                </a:solidFill>
+              </a:defRPr>
+            </a:pPr>
+            <a:r>
+              <a:t>- Phase 8: Reranker Validation &amp; Multi-Signal Scoring (36 tests)</a:t>
+            </a:r>
+          </a:p>
+          <a:p>
+            <a:pPr lvl="1">
+              <a:spcAft>
+                <a:spcPts val="400"/>
+              </a:spcAft>
+              <a:defRPr sz="1300">
+                <a:solidFill>
+                  <a:srgbClr val="1E293B"/>
+                </a:solidFill>
+              </a:defRPr>
+            </a:pPr>
+            <a:r>
+              <a:t>- Phase 9-10: Pipeline Integration &amp; Bloom's Cognitive Progression (39 tests)</a:t>
+            </a:r>
+          </a:p>
+          <a:p>
+            <a:pPr lvl="1">
+              <a:spcAft>
+                <a:spcPts val="400"/>
+              </a:spcAft>
+              <a:defRPr sz="1300">
+                <a:solidFill>
+                  <a:srgbClr val="1E293B"/>
+                </a:solidFill>
+              </a:defRPr>
+            </a:pPr>
+            <a:r>
+              <a:t>- Phase 11-13: Security Audit, Evaluation Metrics &amp; Golden Dataset Auditing (48 tests)</a:t>
+            </a:r>
+          </a:p>
+          <a:p>
+            <a:pPr lvl="1">
+              <a:spcAft>
+                <a:spcPts val="400"/>
+              </a:spcAft>
+              <a:defRPr sz="1300">
+                <a:solidFill>
+                  <a:srgbClr val="1E293B"/>
+                </a:solidFill>
+              </a:defRPr>
+            </a:pPr>
+            <a:r>
+              <a:t>- Phase 14-18: Frozen Baseline, Hybrid Evaluation &amp; Edge Case Safeguards (56 tests)</a:t>
+            </a:r>
+          </a:p>
+          <a:p>
+            <a:pPr>
+              <a:spcAft>
+                <a:spcPts val="600"/>
+              </a:spcAft>
+              <a:defRPr b="1" sz="1600">
+                <a:solidFill>
+                  <a:srgbClr val="2563EB"/>
+                </a:solidFill>
+              </a:defRPr>
+            </a:pPr>
+            <a:r>
+              <a:t>Key Verified Functional Gates:</a:t>
+            </a:r>
+          </a:p>
+          <a:p>
+            <a:pPr>
+              <a:spcAft>
+                <a:spcPts val="600"/>
+              </a:spcAft>
+              <a:defRPr sz="1500">
+                <a:solidFill>
+                  <a:srgbClr val="1E293B"/>
+                </a:solidFill>
+              </a:defRPr>
+            </a:pPr>
+            <a:r>
+              <a:t>• TC-01: Duplicate auth rejected | TC-02: Corrupt uploads safely handled | TC-03: Sub-25ms retrieval</a:t>
+            </a:r>
+          </a:p>
+          <a:p>
+            <a:pPr>
+              <a:spcAft>
+                <a:spcPts val="600"/>
+              </a:spcAft>
+              <a:defRPr sz="1500">
+                <a:solidFill>
+                  <a:srgbClr val="1E293B"/>
+                </a:solidFill>
+              </a:defRPr>
+            </a:pPr>
+            <a:r>
+              <a:t>• TC-04: Deterministic Bloom state progression | TC-05: Remedial graph prerequisite traversal</a:t>
+            </a:r>
+          </a:p>
+          <a:p>
+            <a:pPr>
+              <a:spcAft>
+                <a:spcPts val="600"/>
+              </a:spcAft>
+              <a:defRPr sz="1500">
+                <a:solidFill>
+                  <a:srgbClr val="1E293B"/>
+                </a:solidFill>
+              </a:defRPr>
+            </a:pPr>
+            <a:r>
+              <a:t>• TC-06: In-memory Edge-TTS &lt;= 1.2s | TC-07: 5-signal rubric convergence | TC-08: Starvation safeguards</a:t>
+            </a:r>
+          </a:p>
+        </p:txBody>
+      </p:sp>
+    </p:spTree>
+  </p:cSld>
+  <p:clrMapOvr>
+    <a:masterClrMapping/>
+  </p:clrMapOvr>
+</p:sld>
+</file>
+
+<file path=ppt/slides/slide14.xml><?xml version="1.0" encoding="utf-8"?>
+<p:sld xmlns:a="http://schemas.openxmlformats.org/drawingml/2006/main" xmlns:p="http://schemas.openxmlformats.org/presentationml/2006/main" xmlns:r="http://schemas.openxmlformats.org/officeDocument/2006/relationships">
+  <p:cSld>
+    <p:spTree>
+      <p:nvGrpSpPr>
+        <p:cNvPr id="1" name=""/>
+        <p:cNvGrpSpPr/>
+        <p:nvPr/>
+      </p:nvGrpSpPr>
+      <p:grpSpPr/>
+      <p:sp>
+        <p:nvSpPr>
           <p:cNvPr id="2" name="Title 1"/>
           <p:cNvSpPr>
             <a:spLocks noGrp="1"/>
@@ -3362,14 +4499,14 @@
           <a:lstStyle/>
           <a:p>
             <a:pPr>
-              <a:defRPr sz="3600" b="1">
+              <a:defRPr sz="3800" b="1">
                 <a:solidFill>
                   <a:srgbClr val="1A365D"/>
                 </a:solidFill>
               </a:defRPr>
             </a:pPr>
             <a:r>
-              <a:t>Conclusion &amp; Q&amp;A</a:t>
+              <a:t>Conclusion &amp; Viva Q&amp;A</a:t>
             </a:r>
           </a:p>
         </p:txBody>
@@ -3390,7 +4527,11 @@
           <a:lstStyle/>
           <a:p>
             <a:pPr>
-              <a:defRPr sz="1800"/>
+              <a:defRPr sz="1700">
+                <a:solidFill>
+                  <a:srgbClr val="1E293B"/>
+                </a:solidFill>
+              </a:defRPr>
             </a:pPr>
             <a:r>
               <a:t>SmartInterview: Grounded, Adaptive, and Deterministic Technical Interview Preparation.</a:t>
@@ -3398,28 +4539,92 @@
           </a:p>
           <a:p>
             <a:pPr>
-              <a:defRPr sz="1800"/>
-            </a:pPr>
-          </a:p>
-          <a:p>
-            <a:pPr>
-              <a:defRPr sz="1800"/>
-            </a:pPr>
-            <a:r>
-              <a:t>Bridging higher education and industry hiring through 402-chunk RAG, Bloom's cognitive engine, and low-latency voice.</a:t>
-            </a:r>
-          </a:p>
-          <a:p>
-            <a:pPr>
-              <a:defRPr sz="1800"/>
-            </a:pPr>
-          </a:p>
-          <a:p>
-            <a:pPr>
-              <a:defRPr sz="1800"/>
-            </a:pPr>
-            <a:r>
-              <a:t>Thank you! We invite questions from the panel.</a:t>
+              <a:defRPr sz="1700">
+                <a:solidFill>
+                  <a:srgbClr val="1E293B"/>
+                </a:solidFill>
+              </a:defRPr>
+            </a:pPr>
+          </a:p>
+          <a:p>
+            <a:pPr>
+              <a:defRPr sz="1500">
+                <a:solidFill>
+                  <a:srgbClr val="1E293B"/>
+                </a:solidFill>
+              </a:defRPr>
+            </a:pPr>
+            <a:r>
+              <a:t>• Curated 402-Chunk Hybrid Graph RAG eliminating LLM hallucinations.</a:t>
+            </a:r>
+          </a:p>
+          <a:p>
+            <a:pPr>
+              <a:defRPr sz="1500">
+                <a:solidFill>
+                  <a:srgbClr val="1E293B"/>
+                </a:solidFill>
+              </a:defRPr>
+            </a:pPr>
+            <a:r>
+              <a:t>• Deterministic Bloom's Taxonomy cognitive progression.</a:t>
+            </a:r>
+          </a:p>
+          <a:p>
+            <a:pPr>
+              <a:defRPr sz="1500">
+                <a:solidFill>
+                  <a:srgbClr val="1E293B"/>
+                </a:solidFill>
+              </a:defRPr>
+            </a:pPr>
+            <a:r>
+              <a:t>• Objective 5-Signal mathematical evaluation eliminating 'vibe grading'.</a:t>
+            </a:r>
+          </a:p>
+          <a:p>
+            <a:pPr>
+              <a:defRPr sz="1500">
+                <a:solidFill>
+                  <a:srgbClr val="1E293B"/>
+                </a:solidFill>
+              </a:defRPr>
+            </a:pPr>
+            <a:r>
+              <a:t>• Remedial Mastery Mode for targeted upskilling &amp; focused retests.</a:t>
+            </a:r>
+          </a:p>
+          <a:p>
+            <a:pPr>
+              <a:defRPr sz="1500">
+                <a:solidFill>
+                  <a:srgbClr val="1E293B"/>
+                </a:solidFill>
+              </a:defRPr>
+            </a:pPr>
+            <a:r>
+              <a:t>• Low-latency, two-way neural voice interaction at zero infrastructure cost.</a:t>
+            </a:r>
+          </a:p>
+          <a:p>
+            <a:pPr>
+              <a:defRPr sz="1500">
+                <a:solidFill>
+                  <a:srgbClr val="1E293B"/>
+                </a:solidFill>
+              </a:defRPr>
+            </a:pPr>
+          </a:p>
+          <a:p>
+            <a:pPr>
+              <a:defRPr sz="1500">
+                <a:solidFill>
+                  <a:srgbClr val="1E293B"/>
+                </a:solidFill>
+              </a:defRPr>
+            </a:pPr>
+            <a:r>
+              <a:t>Thank you! We invite questions and technical discussion from the honorable panel.</a:t>
             </a:r>
           </a:p>
         </p:txBody>
@@ -3444,129 +4649,273 @@
       <p:grpSpPr/>
       <p:sp>
         <p:nvSpPr>
-          <p:cNvPr id="2" name="Title 1"/>
-          <p:cNvSpPr>
-            <a:spLocks noGrp="1"/>
-          </p:cNvSpPr>
-          <p:nvPr>
-            <p:ph type="title"/>
-          </p:nvPr>
-        </p:nvSpPr>
-        <p:spPr/>
-        <p:txBody>
-          <a:bodyPr/>
-          <a:lstStyle/>
-          <a:p>
-            <a:pPr>
-              <a:defRPr sz="2800" b="1">
+          <p:cNvPr id="2" name="TextBox 1"/>
+          <p:cNvSpPr txBox="1"/>
+          <p:nvPr/>
+        </p:nvSpPr>
+        <p:spPr>
+          <a:xfrm>
+            <a:off x="731520" y="365760"/>
+            <a:ext cx="10698480" cy="365760"/>
+          </a:xfrm>
+          <a:prstGeom prst="rect">
+            <a:avLst/>
+          </a:prstGeom>
+          <a:noFill/>
+        </p:spPr>
+        <p:txBody>
+          <a:bodyPr wrap="square">
+            <a:spAutoFit/>
+          </a:bodyPr>
+          <a:lstStyle/>
+          <a:p>
+            <a:pPr>
+              <a:defRPr sz="1000" b="1">
+                <a:solidFill>
+                  <a:srgbClr val="2563EB"/>
+                </a:solidFill>
+              </a:defRPr>
+            </a:pPr>
+            <a:r>
+              <a:t>SMARTINTERVIEW — ACADEMIC VIVA &amp; TECHNICAL DEFENSE</a:t>
+            </a:r>
+          </a:p>
+        </p:txBody>
+      </p:sp>
+      <p:sp>
+        <p:nvSpPr>
+          <p:cNvPr id="3" name="TextBox 2"/>
+          <p:cNvSpPr txBox="1"/>
+          <p:nvPr/>
+        </p:nvSpPr>
+        <p:spPr>
+          <a:xfrm>
+            <a:off x="731520" y="640080"/>
+            <a:ext cx="10698480" cy="731520"/>
+          </a:xfrm>
+          <a:prstGeom prst="rect">
+            <a:avLst/>
+          </a:prstGeom>
+          <a:noFill/>
+        </p:spPr>
+        <p:txBody>
+          <a:bodyPr wrap="square">
+            <a:spAutoFit/>
+          </a:bodyPr>
+          <a:lstStyle/>
+          <a:p>
+            <a:pPr>
+              <a:defRPr sz="2600" b="1">
                 <a:solidFill>
                   <a:srgbClr val="1A365D"/>
                 </a:solidFill>
               </a:defRPr>
             </a:pPr>
             <a:r>
-              <a:t>Introduction &amp; Literature Gaps</a:t>
-            </a:r>
-          </a:p>
-        </p:txBody>
-      </p:sp>
-      <p:sp>
-        <p:nvSpPr>
-          <p:cNvPr id="3" name="Content Placeholder 2"/>
-          <p:cNvSpPr>
-            <a:spLocks noGrp="1"/>
-          </p:cNvSpPr>
-          <p:nvPr>
-            <p:ph idx="1"/>
-          </p:nvPr>
-        </p:nvSpPr>
-        <p:spPr/>
-        <p:txBody>
-          <a:bodyPr wrap="square"/>
-          <a:lstStyle/>
-          <a:p>
-            <a:pPr>
-              <a:spcAft>
-                <a:spcPts val="800"/>
-              </a:spcAft>
-              <a:defRPr b="1" sz="1800">
-                <a:solidFill>
-                  <a:srgbClr val="2B6CB0"/>
-                </a:solidFill>
-              </a:defRPr>
-            </a:pPr>
-            <a:r>
-              <a:t>The Challenge in Technical Campus Recruitment:</a:t>
-            </a:r>
-          </a:p>
-          <a:p>
-            <a:pPr>
-              <a:spcAft>
-                <a:spcPts val="600"/>
-              </a:spcAft>
-              <a:defRPr sz="1700"/>
-            </a:pPr>
-            <a:r>
-              <a:t>• Disconnect between static academic curricula and dynamic industry job descriptions.</a:t>
-            </a:r>
-          </a:p>
-          <a:p>
-            <a:pPr>
-              <a:spcAft>
-                <a:spcPts val="600"/>
-              </a:spcAft>
-              <a:defRPr sz="1700"/>
-            </a:pPr>
-            <a:r>
-              <a:t>• High student anxiety, lack of verbal articulation practice, and high placement attrition.</a:t>
-            </a:r>
-          </a:p>
-          <a:p>
-            <a:pPr>
-              <a:spcAft>
-                <a:spcPts val="800"/>
-              </a:spcAft>
-              <a:defRPr b="1" sz="1800">
-                <a:solidFill>
-                  <a:srgbClr val="2B6CB0"/>
-                </a:solidFill>
-              </a:defRPr>
-            </a:pPr>
-            <a:r>
-              <a:t>Gaps Identified in Foundational 2026 Literature:</a:t>
-            </a:r>
-          </a:p>
-          <a:p>
-            <a:pPr>
-              <a:spcAft>
-                <a:spcPts val="600"/>
-              </a:spcAft>
-              <a:defRPr sz="1700"/>
-            </a:pPr>
-            <a:r>
-              <a:t>• Base Paper 1 (Nagarajan et al., Feb 2026): Enterprise recruiter screening filter; lacks candidate feedback, diagnostic reports, code sandboxes, or curriculum grounding.</a:t>
-            </a:r>
-          </a:p>
-          <a:p>
-            <a:pPr>
-              <a:spcAft>
-                <a:spcPts val="600"/>
-              </a:spcAft>
-              <a:defRPr sz="1700"/>
-            </a:pPr>
-            <a:r>
-              <a:t>• Base Paper 2 (Wahid et al., March 2026): Voice is strictly one-way (silent AI, student reads text); rigid domain dropdowns without custom JD matching.</a:t>
-            </a:r>
-          </a:p>
-          <a:p>
-            <a:pPr>
-              <a:spcAft>
-                <a:spcPts val="600"/>
-              </a:spcAft>
-              <a:defRPr sz="1700"/>
-            </a:pPr>
-            <a:r>
-              <a:t>• Core Gap: Students lack a grounded, low-latency, two-way conversational coach with objective scoring.</a:t>
+              <a:t>Literature Gaps &amp; Problem Statement</a:t>
+            </a:r>
+          </a:p>
+        </p:txBody>
+      </p:sp>
+      <p:sp>
+        <p:nvSpPr>
+          <p:cNvPr id="4" name="TextBox 3"/>
+          <p:cNvSpPr txBox="1"/>
+          <p:nvPr/>
+        </p:nvSpPr>
+        <p:spPr>
+          <a:xfrm>
+            <a:off x="731520" y="1371600"/>
+            <a:ext cx="10698480" cy="5029200"/>
+          </a:xfrm>
+          <a:prstGeom prst="rect">
+            <a:avLst/>
+          </a:prstGeom>
+          <a:noFill/>
+        </p:spPr>
+        <p:txBody>
+          <a:bodyPr wrap="square">
+            <a:spAutoFit/>
+          </a:bodyPr>
+          <a:lstStyle/>
+          <a:p>
+            <a:pPr>
+              <a:spcAft>
+                <a:spcPts val="600"/>
+              </a:spcAft>
+              <a:defRPr b="1" sz="1600">
+                <a:solidFill>
+                  <a:srgbClr val="2563EB"/>
+                </a:solidFill>
+              </a:defRPr>
+            </a:pPr>
+            <a:r>
+              <a:t>The Problem in Higher Education Technical Recruitment:</a:t>
+            </a:r>
+          </a:p>
+          <a:p>
+            <a:pPr>
+              <a:spcAft>
+                <a:spcPts val="600"/>
+              </a:spcAft>
+              <a:defRPr sz="1500">
+                <a:solidFill>
+                  <a:srgbClr val="1E293B"/>
+                </a:solidFill>
+              </a:defRPr>
+            </a:pPr>
+            <a:r>
+              <a:t>• Massive student cohorts face high anxiety, lack of articulation practice, and high placement attrition.</a:t>
+            </a:r>
+          </a:p>
+          <a:p>
+            <a:pPr>
+              <a:spcAft>
+                <a:spcPts val="600"/>
+              </a:spcAft>
+              <a:defRPr sz="1500">
+                <a:solidFill>
+                  <a:srgbClr val="1E293B"/>
+                </a:solidFill>
+              </a:defRPr>
+            </a:pPr>
+            <a:r>
+              <a:t>• Static coding portals (LeetCode, HackerRank) test binary syntax but cannot assess architectural reasoning or verbal dialogue.</a:t>
+            </a:r>
+          </a:p>
+          <a:p>
+            <a:pPr>
+              <a:spcAft>
+                <a:spcPts val="600"/>
+              </a:spcAft>
+              <a:defRPr b="1" sz="1600">
+                <a:solidFill>
+                  <a:srgbClr val="2563EB"/>
+                </a:solidFill>
+              </a:defRPr>
+            </a:pPr>
+            <a:r>
+              <a:t>Critical Gaps in Foundational 2026 Base Papers:</a:t>
+            </a:r>
+          </a:p>
+          <a:p>
+            <a:pPr>
+              <a:spcAft>
+                <a:spcPts val="600"/>
+              </a:spcAft>
+              <a:defRPr sz="1500">
+                <a:solidFill>
+                  <a:srgbClr val="1E293B"/>
+                </a:solidFill>
+              </a:defRPr>
+            </a:pPr>
+            <a:r>
+              <a:t>• Base Paper 1 (Nagarajan et al., Feb 2026 — IJMRR):</a:t>
+            </a:r>
+          </a:p>
+          <a:p>
+            <a:pPr lvl="1">
+              <a:spcAft>
+                <a:spcPts val="400"/>
+              </a:spcAft>
+              <a:defRPr sz="1300">
+                <a:solidFill>
+                  <a:srgbClr val="1E293B"/>
+                </a:solidFill>
+              </a:defRPr>
+            </a:pPr>
+            <a:r>
+              <a:t>- Built strictly for enterprise recruiters to screen candidates out.</a:t>
+            </a:r>
+          </a:p>
+          <a:p>
+            <a:pPr lvl="1">
+              <a:spcAft>
+                <a:spcPts val="400"/>
+              </a:spcAft>
+              <a:defRPr sz="1300">
+                <a:solidFill>
+                  <a:srgbClr val="1E293B"/>
+                </a:solidFill>
+              </a:defRPr>
+            </a:pPr>
+            <a:r>
+              <a:t>- Offers zero student diagnostic feedback, no study roadmap, and volatile session state.</a:t>
+            </a:r>
+          </a:p>
+          <a:p>
+            <a:pPr>
+              <a:spcAft>
+                <a:spcPts val="600"/>
+              </a:spcAft>
+              <a:defRPr sz="1500">
+                <a:solidFill>
+                  <a:srgbClr val="1E293B"/>
+                </a:solidFill>
+              </a:defRPr>
+            </a:pPr>
+            <a:r>
+              <a:t>• Base Paper 2 (Wahid et al., March 2026 — IJERT):</a:t>
+            </a:r>
+          </a:p>
+          <a:p>
+            <a:pPr lvl="1">
+              <a:spcAft>
+                <a:spcPts val="400"/>
+              </a:spcAft>
+              <a:defRPr sz="1300">
+                <a:solidFill>
+                  <a:srgbClr val="1E293B"/>
+                </a:solidFill>
+              </a:defRPr>
+            </a:pPr>
+            <a:r>
+              <a:t>- Silent AI: strictly one-way voice (Whisper STT only, candidate must read text questions).</a:t>
+            </a:r>
+          </a:p>
+          <a:p>
+            <a:pPr lvl="1">
+              <a:spcAft>
+                <a:spcPts val="400"/>
+              </a:spcAft>
+              <a:defRPr sz="1300">
+                <a:solidFill>
+                  <a:srgbClr val="1E293B"/>
+                </a:solidFill>
+              </a:defRPr>
+            </a:pPr>
+            <a:r>
+              <a:t>- Rigid domain dropdowns without custom Job Description (JD) matching.</a:t>
+            </a:r>
+          </a:p>
+          <a:p>
+            <a:pPr>
+              <a:spcAft>
+                <a:spcPts val="600"/>
+              </a:spcAft>
+              <a:defRPr sz="1500">
+                <a:solidFill>
+                  <a:srgbClr val="1E293B"/>
+                </a:solidFill>
+              </a:defRPr>
+            </a:pPr>
+            <a:r>
+              <a:t>• Shared Vulnerabilities in LLM Chatbots:</a:t>
+            </a:r>
+          </a:p>
+          <a:p>
+            <a:pPr lvl="1">
+              <a:spcAft>
+                <a:spcPts val="400"/>
+              </a:spcAft>
+              <a:defRPr sz="1300">
+                <a:solidFill>
+                  <a:srgbClr val="1E293B"/>
+                </a:solidFill>
+              </a:defRPr>
+            </a:pPr>
+            <a:r>
+              <a:t>- Hallucinations on complex system topics, arbitrary 'vibe grading', and chaotic question jumps.</a:t>
             </a:r>
           </a:p>
         </p:txBody>
@@ -3591,70 +4940,123 @@
       <p:grpSpPr/>
       <p:sp>
         <p:nvSpPr>
-          <p:cNvPr id="2" name="Title 1"/>
-          <p:cNvSpPr>
-            <a:spLocks noGrp="1"/>
-          </p:cNvSpPr>
-          <p:nvPr>
-            <p:ph type="title"/>
-          </p:nvPr>
-        </p:nvSpPr>
-        <p:spPr/>
-        <p:txBody>
-          <a:bodyPr/>
-          <a:lstStyle/>
-          <a:p>
-            <a:pPr>
-              <a:defRPr sz="2800" b="1">
+          <p:cNvPr id="2" name="TextBox 1"/>
+          <p:cNvSpPr txBox="1"/>
+          <p:nvPr/>
+        </p:nvSpPr>
+        <p:spPr>
+          <a:xfrm>
+            <a:off x="731520" y="365760"/>
+            <a:ext cx="10698480" cy="365760"/>
+          </a:xfrm>
+          <a:prstGeom prst="rect">
+            <a:avLst/>
+          </a:prstGeom>
+          <a:noFill/>
+        </p:spPr>
+        <p:txBody>
+          <a:bodyPr wrap="square">
+            <a:spAutoFit/>
+          </a:bodyPr>
+          <a:lstStyle/>
+          <a:p>
+            <a:pPr>
+              <a:defRPr sz="1000" b="1">
+                <a:solidFill>
+                  <a:srgbClr val="2563EB"/>
+                </a:solidFill>
+              </a:defRPr>
+            </a:pPr>
+            <a:r>
+              <a:t>SMARTINTERVIEW — ACADEMIC VIVA &amp; TECHNICAL DEFENSE</a:t>
+            </a:r>
+          </a:p>
+        </p:txBody>
+      </p:sp>
+      <p:sp>
+        <p:nvSpPr>
+          <p:cNvPr id="3" name="TextBox 2"/>
+          <p:cNvSpPr txBox="1"/>
+          <p:nvPr/>
+        </p:nvSpPr>
+        <p:spPr>
+          <a:xfrm>
+            <a:off x="731520" y="640080"/>
+            <a:ext cx="10698480" cy="731520"/>
+          </a:xfrm>
+          <a:prstGeom prst="rect">
+            <a:avLst/>
+          </a:prstGeom>
+          <a:noFill/>
+        </p:spPr>
+        <p:txBody>
+          <a:bodyPr wrap="square">
+            <a:spAutoFit/>
+          </a:bodyPr>
+          <a:lstStyle/>
+          <a:p>
+            <a:pPr>
+              <a:defRPr sz="2600" b="1">
                 <a:solidFill>
                   <a:srgbClr val="1A365D"/>
                 </a:solidFill>
               </a:defRPr>
             </a:pPr>
             <a:r>
-              <a:t>Proposed Solution: SmartInterview</a:t>
-            </a:r>
-          </a:p>
-        </p:txBody>
-      </p:sp>
-      <p:sp>
-        <p:nvSpPr>
-          <p:cNvPr id="3" name="Content Placeholder 2"/>
-          <p:cNvSpPr>
-            <a:spLocks noGrp="1"/>
-          </p:cNvSpPr>
-          <p:nvPr>
-            <p:ph idx="1"/>
-          </p:nvPr>
-        </p:nvSpPr>
-        <p:spPr/>
-        <p:txBody>
-          <a:bodyPr wrap="square"/>
-          <a:lstStyle/>
-          <a:p>
-            <a:pPr>
-              <a:spcAft>
-                <a:spcPts val="800"/>
-              </a:spcAft>
-              <a:defRPr b="1" sz="1800">
-                <a:solidFill>
-                  <a:srgbClr val="2B6CB0"/>
-                </a:solidFill>
-              </a:defRPr>
-            </a:pPr>
-            <a:r>
-              <a:t>An AI-Powered, Adaptive Mock Interview Platform for Higher Education:</a:t>
-            </a:r>
-          </a:p>
-          <a:p>
-            <a:pPr>
-              <a:spcAft>
-                <a:spcPts val="600"/>
-              </a:spcAft>
-              <a:defRPr sz="1700"/>
-            </a:pPr>
-            <a:r>
-              <a:t>• Three Distinct Operational Modes:</a:t>
+              <a:t>Proposed Solution: SmartInterview Ecosystem</a:t>
+            </a:r>
+          </a:p>
+        </p:txBody>
+      </p:sp>
+      <p:sp>
+        <p:nvSpPr>
+          <p:cNvPr id="4" name="TextBox 3"/>
+          <p:cNvSpPr txBox="1"/>
+          <p:nvPr/>
+        </p:nvSpPr>
+        <p:spPr>
+          <a:xfrm>
+            <a:off x="731520" y="1371600"/>
+            <a:ext cx="10698480" cy="5029200"/>
+          </a:xfrm>
+          <a:prstGeom prst="rect">
+            <a:avLst/>
+          </a:prstGeom>
+          <a:noFill/>
+        </p:spPr>
+        <p:txBody>
+          <a:bodyPr wrap="square">
+            <a:spAutoFit/>
+          </a:bodyPr>
+          <a:lstStyle/>
+          <a:p>
+            <a:pPr>
+              <a:spcAft>
+                <a:spcPts val="600"/>
+              </a:spcAft>
+              <a:defRPr b="1" sz="1600">
+                <a:solidFill>
+                  <a:srgbClr val="2563EB"/>
+                </a:solidFill>
+              </a:defRPr>
+            </a:pPr>
+            <a:r>
+              <a:t>An Adaptive, Grounded Mock Interview &amp; Remediation Platform:</a:t>
+            </a:r>
+          </a:p>
+          <a:p>
+            <a:pPr>
+              <a:spcAft>
+                <a:spcPts val="600"/>
+              </a:spcAft>
+              <a:defRPr sz="1500">
+                <a:solidFill>
+                  <a:srgbClr val="1E293B"/>
+                </a:solidFill>
+              </a:defRPr>
+            </a:pPr>
+            <a:r>
+              <a:t>• 3 Distinct Institutional Practice Modes:</a:t>
             </a:r>
           </a:p>
           <a:p>
@@ -3662,10 +5064,14 @@
               <a:spcAft>
                 <a:spcPts val="400"/>
               </a:spcAft>
-              <a:defRPr sz="1500"/>
-            </a:pPr>
-            <a:r>
-              <a:t>- Job-Specific Mode: Set-theoretic Resume-to-JD mapping (Group A Overlap vs. Group B Gaps).</a:t>
+              <a:defRPr sz="1300">
+                <a:solidFill>
+                  <a:srgbClr val="1E293B"/>
+                </a:solidFill>
+              </a:defRPr>
+            </a:pPr>
+            <a:r>
+              <a:t>- 1. Job-Specific Mode: Set-theoretic Resume-to-JD alignment (Group A Overlap vs. Group B Gaps).</a:t>
             </a:r>
           </a:p>
           <a:p>
@@ -3673,10 +5079,14 @@
               <a:spcAft>
                 <a:spcPts val="400"/>
               </a:spcAft>
-              <a:defRPr sz="1500"/>
-            </a:pPr>
-            <a:r>
-              <a:t>- Topic-Based Mode: Granular technical drilling across chosen computer science domains.</a:t>
+              <a:defRPr sz="1300">
+                <a:solidFill>
+                  <a:srgbClr val="1E293B"/>
+                </a:solidFill>
+              </a:defRPr>
+            </a:pPr>
+            <a:r>
+              <a:t>- 2. Topic-Based Mode: Targeted deep-dive across 8 core Computer Science domains.</a:t>
             </a:r>
           </a:p>
           <a:p>
@@ -3684,43 +5094,149 @@
               <a:spcAft>
                 <a:spcPts val="400"/>
               </a:spcAft>
-              <a:defRPr sz="1500"/>
-            </a:pPr>
-            <a:r>
-              <a:t>- Semester Syllabus Mode: Isolated vector collections generated dynamically from syllabus PDFs.</a:t>
-            </a:r>
-          </a:p>
-          <a:p>
-            <a:pPr>
-              <a:spcAft>
-                <a:spcPts val="600"/>
-              </a:spcAft>
-              <a:defRPr sz="1700"/>
-            </a:pPr>
-            <a:r>
-              <a:t>• Curated RAG Grounding: ChromaDB over 402 CS chunks to eliminate hallucinations at the root.</a:t>
-            </a:r>
-          </a:p>
-          <a:p>
-            <a:pPr>
-              <a:spcAft>
-                <a:spcPts val="600"/>
-              </a:spcAft>
-              <a:defRPr sz="1700"/>
-            </a:pPr>
-            <a:r>
-              <a:t>• Deterministic Cognitive Scaffolding: Pedagogical progression via Bloom's Revised Taxonomy.</a:t>
-            </a:r>
-          </a:p>
-          <a:p>
-            <a:pPr>
-              <a:spcAft>
-                <a:spcPts val="600"/>
-              </a:spcAft>
-              <a:defRPr sz="1700"/>
-            </a:pPr>
-            <a:r>
-              <a:t>• Multi-Signal 5-Factor Evaluation: Eliminates subjective black-box LLM 'vibe grading'.</a:t>
+              <a:defRPr sz="1300">
+                <a:solidFill>
+                  <a:srgbClr val="1E293B"/>
+                </a:solidFill>
+              </a:defRPr>
+            </a:pPr>
+            <a:r>
+              <a:t>- 3. Semester Syllabus Mode: Dynamic vector isolation for university course syllabi.</a:t>
+            </a:r>
+          </a:p>
+          <a:p>
+            <a:pPr>
+              <a:spcAft>
+                <a:spcPts val="600"/>
+              </a:spcAft>
+              <a:defRPr sz="1500">
+                <a:solidFill>
+                  <a:srgbClr val="1E293B"/>
+                </a:solidFill>
+              </a:defRPr>
+            </a:pPr>
+            <a:r>
+              <a:t>• Hybrid Graph RAG Grounding Engine:</a:t>
+            </a:r>
+          </a:p>
+          <a:p>
+            <a:pPr lvl="1">
+              <a:spcAft>
+                <a:spcPts val="400"/>
+              </a:spcAft>
+              <a:defRPr sz="1300">
+                <a:solidFill>
+                  <a:srgbClr val="1E293B"/>
+                </a:solidFill>
+              </a:defRPr>
+            </a:pPr>
+            <a:r>
+              <a:t>- Combines Dense Semantic ChromaDB, BM25Okapi Lexical matching, and NetworkX Graph Traversal.</a:t>
+            </a:r>
+          </a:p>
+          <a:p>
+            <a:pPr lvl="1">
+              <a:spcAft>
+                <a:spcPts val="400"/>
+              </a:spcAft>
+              <a:defRPr sz="1300">
+                <a:solidFill>
+                  <a:srgbClr val="1E293B"/>
+                </a:solidFill>
+              </a:defRPr>
+            </a:pPr>
+            <a:r>
+              <a:t>- Eliminates technical hallucinations with 100% Hit@3 accuracy over 402 curated CS chunks.</a:t>
+            </a:r>
+          </a:p>
+          <a:p>
+            <a:pPr>
+              <a:spcAft>
+                <a:spcPts val="600"/>
+              </a:spcAft>
+              <a:defRPr sz="1500">
+                <a:solidFill>
+                  <a:srgbClr val="1E293B"/>
+                </a:solidFill>
+              </a:defRPr>
+            </a:pPr>
+            <a:r>
+              <a:t>• Deterministic Cognitive Scaffolding (Bloom's Taxonomy):</a:t>
+            </a:r>
+          </a:p>
+          <a:p>
+            <a:pPr lvl="1">
+              <a:spcAft>
+                <a:spcPts val="400"/>
+              </a:spcAft>
+              <a:defRPr sz="1300">
+                <a:solidFill>
+                  <a:srgbClr val="1E293B"/>
+                </a:solidFill>
+              </a:defRPr>
+            </a:pPr>
+            <a:r>
+              <a:t>- Finite state machine advancing through Remember, Understand, Apply, Analyze, Evaluate, Create.</a:t>
+            </a:r>
+          </a:p>
+          <a:p>
+            <a:pPr>
+              <a:spcAft>
+                <a:spcPts val="600"/>
+              </a:spcAft>
+              <a:defRPr sz="1500">
+                <a:solidFill>
+                  <a:srgbClr val="1E293B"/>
+                </a:solidFill>
+              </a:defRPr>
+            </a:pPr>
+            <a:r>
+              <a:t>• Objective 5-Factor Answer Evaluation Rubric:</a:t>
+            </a:r>
+          </a:p>
+          <a:p>
+            <a:pPr lvl="1">
+              <a:spcAft>
+                <a:spcPts val="400"/>
+              </a:spcAft>
+              <a:defRPr sz="1300">
+                <a:solidFill>
+                  <a:srgbClr val="1E293B"/>
+                </a:solidFill>
+              </a:defRPr>
+            </a:pPr>
+            <a:r>
+              <a:t>- Replaces subjective LLM grading with verifiable mathematical scoring and S-BERT cosine similarity.</a:t>
+            </a:r>
+          </a:p>
+          <a:p>
+            <a:pPr>
+              <a:spcAft>
+                <a:spcPts val="600"/>
+              </a:spcAft>
+              <a:defRPr sz="1500">
+                <a:solidFill>
+                  <a:srgbClr val="1E293B"/>
+                </a:solidFill>
+              </a:defRPr>
+            </a:pPr>
+            <a:r>
+              <a:t>• Remedial Mastery Mode:</a:t>
+            </a:r>
+          </a:p>
+          <a:p>
+            <a:pPr lvl="1">
+              <a:spcAft>
+                <a:spcPts val="400"/>
+              </a:spcAft>
+              <a:defRPr sz="1300">
+                <a:solidFill>
+                  <a:srgbClr val="1E293B"/>
+                </a:solidFill>
+              </a:defRPr>
+            </a:pPr>
+            <a:r>
+              <a:t>- Diagnoses weak prerequisite concepts and provides 1-click focused retesting.</a:t>
             </a:r>
           </a:p>
         </p:txBody>
@@ -3745,21 +5261,63 @@
       <p:grpSpPr/>
       <p:sp>
         <p:nvSpPr>
-          <p:cNvPr id="2" name="Title 1"/>
-          <p:cNvSpPr>
-            <a:spLocks noGrp="1"/>
-          </p:cNvSpPr>
-          <p:nvPr>
-            <p:ph type="title"/>
-          </p:nvPr>
-        </p:nvSpPr>
-        <p:spPr/>
-        <p:txBody>
-          <a:bodyPr/>
-          <a:lstStyle/>
-          <a:p>
-            <a:pPr>
-              <a:defRPr sz="2800" b="1">
+          <p:cNvPr id="2" name="TextBox 1"/>
+          <p:cNvSpPr txBox="1"/>
+          <p:nvPr/>
+        </p:nvSpPr>
+        <p:spPr>
+          <a:xfrm>
+            <a:off x="731520" y="365760"/>
+            <a:ext cx="10698480" cy="365760"/>
+          </a:xfrm>
+          <a:prstGeom prst="rect">
+            <a:avLst/>
+          </a:prstGeom>
+          <a:noFill/>
+        </p:spPr>
+        <p:txBody>
+          <a:bodyPr wrap="square">
+            <a:spAutoFit/>
+          </a:bodyPr>
+          <a:lstStyle/>
+          <a:p>
+            <a:pPr>
+              <a:defRPr sz="1000" b="1">
+                <a:solidFill>
+                  <a:srgbClr val="2563EB"/>
+                </a:solidFill>
+              </a:defRPr>
+            </a:pPr>
+            <a:r>
+              <a:t>SMARTINTERVIEW — ACADEMIC VIVA &amp; TECHNICAL DEFENSE</a:t>
+            </a:r>
+          </a:p>
+        </p:txBody>
+      </p:sp>
+      <p:sp>
+        <p:nvSpPr>
+          <p:cNvPr id="3" name="TextBox 2"/>
+          <p:cNvSpPr txBox="1"/>
+          <p:nvPr/>
+        </p:nvSpPr>
+        <p:spPr>
+          <a:xfrm>
+            <a:off x="731520" y="640080"/>
+            <a:ext cx="10698480" cy="731520"/>
+          </a:xfrm>
+          <a:prstGeom prst="rect">
+            <a:avLst/>
+          </a:prstGeom>
+          <a:noFill/>
+        </p:spPr>
+        <p:txBody>
+          <a:bodyPr wrap="square">
+            <a:spAutoFit/>
+          </a:bodyPr>
+          <a:lstStyle/>
+          <a:p>
+            <a:pPr>
+              <a:defRPr sz="2600" b="1">
                 <a:solidFill>
                   <a:srgbClr val="1A365D"/>
                 </a:solidFill>
@@ -3773,64 +5331,53 @@
       </p:sp>
       <p:sp>
         <p:nvSpPr>
-          <p:cNvPr id="3" name="Content Placeholder 2"/>
-          <p:cNvSpPr>
-            <a:spLocks noGrp="1"/>
-          </p:cNvSpPr>
-          <p:nvPr>
-            <p:ph idx="1"/>
-          </p:nvPr>
-        </p:nvSpPr>
-        <p:spPr/>
-        <p:txBody>
-          <a:bodyPr wrap="square"/>
-          <a:lstStyle/>
-          <a:p>
-            <a:pPr>
-              <a:spcAft>
-                <a:spcPts val="800"/>
-              </a:spcAft>
-              <a:defRPr b="1" sz="1800">
-                <a:solidFill>
-                  <a:srgbClr val="2B6CB0"/>
-                </a:solidFill>
-              </a:defRPr>
-            </a:pPr>
-            <a:r>
-              <a:t>High-Performance, Low-Latency Technology Stack:</a:t>
-            </a:r>
-          </a:p>
-          <a:p>
-            <a:pPr>
-              <a:spcAft>
-                <a:spcPts val="600"/>
-              </a:spcAft>
-              <a:defRPr sz="1700"/>
-            </a:pPr>
-            <a:r>
-              <a:t>• Presentation Tier: React 18 SPA (Vite, Tailwind CSS, Web Speech API audio visualizer).</a:t>
-            </a:r>
-          </a:p>
-          <a:p>
-            <a:pPr>
-              <a:spcAft>
-                <a:spcPts val="600"/>
-              </a:spcAft>
-              <a:defRPr sz="1700"/>
-            </a:pPr>
-            <a:r>
-              <a:t>• Application Routing: FastAPI (Python 3.10+, Uvicorn ASGI, Pydantic v2, HS256 JWT auth).</a:t>
-            </a:r>
-          </a:p>
-          <a:p>
-            <a:pPr>
-              <a:spcAft>
-                <a:spcPts val="600"/>
-              </a:spcAft>
-              <a:defRPr sz="1700"/>
-            </a:pPr>
-            <a:r>
-              <a:t>• Core Intelligence Tier:</a:t>
+          <p:cNvPr id="4" name="TextBox 3"/>
+          <p:cNvSpPr txBox="1"/>
+          <p:nvPr/>
+        </p:nvSpPr>
+        <p:spPr>
+          <a:xfrm>
+            <a:off x="731520" y="1371600"/>
+            <a:ext cx="5303520" cy="5029200"/>
+          </a:xfrm>
+          <a:prstGeom prst="rect">
+            <a:avLst/>
+          </a:prstGeom>
+          <a:noFill/>
+        </p:spPr>
+        <p:txBody>
+          <a:bodyPr wrap="square">
+            <a:spAutoFit/>
+          </a:bodyPr>
+          <a:lstStyle/>
+          <a:p>
+            <a:pPr>
+              <a:spcAft>
+                <a:spcPts val="600"/>
+              </a:spcAft>
+              <a:defRPr b="1" sz="1600">
+                <a:solidFill>
+                  <a:srgbClr val="2563EB"/>
+                </a:solidFill>
+              </a:defRPr>
+            </a:pPr>
+            <a:r>
+              <a:t>Zero-Budget, High-Throughput Engineering:</a:t>
+            </a:r>
+          </a:p>
+          <a:p>
+            <a:pPr>
+              <a:spcAft>
+                <a:spcPts val="600"/>
+              </a:spcAft>
+              <a:defRPr sz="1500">
+                <a:solidFill>
+                  <a:srgbClr val="1E293B"/>
+                </a:solidFill>
+              </a:defRPr>
+            </a:pPr>
+            <a:r>
+              <a:t>• 1. Presentation Tier (Client):</a:t>
             </a:r>
           </a:p>
           <a:p>
@@ -3838,10 +5385,14 @@
               <a:spcAft>
                 <a:spcPts val="400"/>
               </a:spcAft>
-              <a:defRPr sz="1500"/>
-            </a:pPr>
-            <a:r>
-              <a:t>- ChromaDB HNSW Vector Store ('technical_kb', 402 chunks, 384-dim S-BERT embeddings).</a:t>
+              <a:defRPr sz="1300">
+                <a:solidFill>
+                  <a:srgbClr val="1E293B"/>
+                </a:solidFill>
+              </a:defRPr>
+            </a:pPr>
+            <a:r>
+              <a:t>- React 18 SPA + Vite 6 + Tailwind CSS.</a:t>
             </a:r>
           </a:p>
           <a:p>
@@ -3849,10 +5400,29 @@
               <a:spcAft>
                 <a:spcPts val="400"/>
               </a:spcAft>
-              <a:defRPr sz="1500"/>
-            </a:pPr>
-            <a:r>
-              <a:t>- Groq Cloud LPU Inference (Llama 3.3 70B / GPT-OSS 120B, 320ms TTFT).</a:t>
+              <a:defRPr sz="1300">
+                <a:solidFill>
+                  <a:srgbClr val="1E293B"/>
+                </a:solidFill>
+              </a:defRPr>
+            </a:pPr>
+            <a:r>
+              <a:t>- HTML5 Web Audio streaming &amp; visualizers.</a:t>
+            </a:r>
+          </a:p>
+          <a:p>
+            <a:pPr>
+              <a:spcAft>
+                <a:spcPts val="600"/>
+              </a:spcAft>
+              <a:defRPr sz="1500">
+                <a:solidFill>
+                  <a:srgbClr val="1E293B"/>
+                </a:solidFill>
+              </a:defRPr>
+            </a:pPr>
+            <a:r>
+              <a:t>• 2. Application Tier (Backend Microservices):</a:t>
             </a:r>
           </a:p>
           <a:p>
@@ -3860,21 +5430,14 @@
               <a:spcAft>
                 <a:spcPts val="400"/>
               </a:spcAft>
-              <a:defRPr sz="1500"/>
-            </a:pPr>
-            <a:r>
-              <a:t>- Deterministic Python Bloom Adaptive State Engine.</a:t>
-            </a:r>
-          </a:p>
-          <a:p>
-            <a:pPr>
-              <a:spcAft>
-                <a:spcPts val="600"/>
-              </a:spcAft>
-              <a:defRPr sz="1700"/>
-            </a:pPr>
-            <a:r>
-              <a:t>• Voice Subsystem &amp; Persistence:</a:t>
+              <a:defRPr sz="1300">
+                <a:solidFill>
+                  <a:srgbClr val="1E293B"/>
+                </a:solidFill>
+              </a:defRPr>
+            </a:pPr>
+            <a:r>
+              <a:t>- FastAPI 0.115 ASGI + Python 3.10+ + Uvicorn.</a:t>
             </a:r>
           </a:p>
           <a:p>
@@ -3882,10 +5445,29 @@
               <a:spcAft>
                 <a:spcPts val="400"/>
               </a:spcAft>
-              <a:defRPr sz="1500"/>
-            </a:pPr>
-            <a:r>
-              <a:t>- Microsoft Edge-TTS (en-US-ChristopherNeural, in-memory io.BytesIO, &lt;= 1.2s latency).</a:t>
+              <a:defRPr sz="1300">
+                <a:solidFill>
+                  <a:srgbClr val="1E293B"/>
+                </a:solidFill>
+              </a:defRPr>
+            </a:pPr>
+            <a:r>
+              <a:t>- Pydantic v2 validation + HS256 JWT auth.</a:t>
+            </a:r>
+          </a:p>
+          <a:p>
+            <a:pPr>
+              <a:spcAft>
+                <a:spcPts val="600"/>
+              </a:spcAft>
+              <a:defRPr sz="1500">
+                <a:solidFill>
+                  <a:srgbClr val="1E293B"/>
+                </a:solidFill>
+              </a:defRPr>
+            </a:pPr>
+            <a:r>
+              <a:t>• 3. Persistence &amp; Vector Storage Tier:</a:t>
             </a:r>
           </a:p>
           <a:p>
@@ -3893,10 +5475,14 @@
               <a:spcAft>
                 <a:spcPts val="400"/>
               </a:spcAft>
-              <a:defRPr sz="1500"/>
-            </a:pPr>
-            <a:r>
-              <a:t>- Whisper Large-v3 STT with domain-primed technical vocabulary prompt.</a:t>
+              <a:defRPr sz="1300">
+                <a:solidFill>
+                  <a:srgbClr val="1E293B"/>
+                </a:solidFill>
+              </a:defRPr>
+            </a:pPr>
+            <a:r>
+              <a:t>- MySQL 8.0 (InnoDB): 7 relational tables.</a:t>
             </a:r>
           </a:p>
           <a:p>
@@ -3904,14 +5490,102 @@
               <a:spcAft>
                 <a:spcPts val="400"/>
               </a:spcAft>
-              <a:defRPr sz="1500"/>
-            </a:pPr>
-            <a:r>
-              <a:t>- MySQL 8.0 relational database for users, sessions, and transcripts.</a:t>
-            </a:r>
-          </a:p>
-        </p:txBody>
-      </p:sp>
+              <a:defRPr sz="1300">
+                <a:solidFill>
+                  <a:srgbClr val="1E293B"/>
+                </a:solidFill>
+              </a:defRPr>
+            </a:pPr>
+            <a:r>
+              <a:t>- ChromaDB 0.6.3: 384-dim local HNSW vector index.</a:t>
+            </a:r>
+          </a:p>
+          <a:p>
+            <a:pPr lvl="1">
+              <a:spcAft>
+                <a:spcPts val="400"/>
+              </a:spcAft>
+              <a:defRPr sz="1300">
+                <a:solidFill>
+                  <a:srgbClr val="1E293B"/>
+                </a:solidFill>
+              </a:defRPr>
+            </a:pPr>
+            <a:r>
+              <a:t>- NetworkX: In-memory prerequisite knowledge graph.</a:t>
+            </a:r>
+          </a:p>
+          <a:p>
+            <a:pPr>
+              <a:spcAft>
+                <a:spcPts val="600"/>
+              </a:spcAft>
+              <a:defRPr sz="1500">
+                <a:solidFill>
+                  <a:srgbClr val="1E293B"/>
+                </a:solidFill>
+              </a:defRPr>
+            </a:pPr>
+            <a:r>
+              <a:t>• 4. Cloud Inference &amp; Neural Voice Tier:</a:t>
+            </a:r>
+          </a:p>
+          <a:p>
+            <a:pPr lvl="1">
+              <a:spcAft>
+                <a:spcPts val="400"/>
+              </a:spcAft>
+              <a:defRPr sz="1300">
+                <a:solidFill>
+                  <a:srgbClr val="1E293B"/>
+                </a:solidFill>
+              </a:defRPr>
+            </a:pPr>
+            <a:r>
+              <a:t>- Groq Cloud LPU: Llama 3.3 70B &amp; Whisper Large-v3.</a:t>
+            </a:r>
+          </a:p>
+          <a:p>
+            <a:pPr lvl="1">
+              <a:spcAft>
+                <a:spcPts val="400"/>
+              </a:spcAft>
+              <a:defRPr sz="1300">
+                <a:solidFill>
+                  <a:srgbClr val="1E293B"/>
+                </a:solidFill>
+              </a:defRPr>
+            </a:pPr>
+            <a:r>
+              <a:t>- Microsoft Edge-TTS: In-memory byte streaming (&lt;= 1.2s).</a:t>
+            </a:r>
+          </a:p>
+        </p:txBody>
+      </p:sp>
+      <p:pic>
+        <p:nvPicPr>
+          <p:cNvPr id="5" name="Picture 4" descr="Architecture.png"/>
+          <p:cNvPicPr>
+            <a:picLocks noChangeAspect="1"/>
+          </p:cNvPicPr>
+          <p:nvPr/>
+        </p:nvPicPr>
+        <p:blipFill>
+          <a:blip r:embed="rId2"/>
+          <a:stretch>
+            <a:fillRect/>
+          </a:stretch>
+        </p:blipFill>
+        <p:spPr>
+          <a:xfrm>
+            <a:off x="6400800" y="1645920"/>
+            <a:ext cx="5303520" cy="3302073"/>
+          </a:xfrm>
+          <a:prstGeom prst="rect">
+            <a:avLst/>
+          </a:prstGeom>
+        </p:spPr>
+      </p:pic>
     </p:spTree>
   </p:cSld>
   <p:clrMapOvr>
@@ -3932,92 +5606,123 @@
       <p:grpSpPr/>
       <p:sp>
         <p:nvSpPr>
-          <p:cNvPr id="2" name="Title 1"/>
-          <p:cNvSpPr>
-            <a:spLocks noGrp="1"/>
-          </p:cNvSpPr>
-          <p:nvPr>
-            <p:ph type="title"/>
-          </p:nvPr>
-        </p:nvSpPr>
-        <p:spPr/>
-        <p:txBody>
-          <a:bodyPr/>
-          <a:lstStyle/>
-          <a:p>
-            <a:pPr>
-              <a:defRPr sz="2800" b="1">
+          <p:cNvPr id="2" name="TextBox 1"/>
+          <p:cNvSpPr txBox="1"/>
+          <p:nvPr/>
+        </p:nvSpPr>
+        <p:spPr>
+          <a:xfrm>
+            <a:off x="731520" y="365760"/>
+            <a:ext cx="10698480" cy="365760"/>
+          </a:xfrm>
+          <a:prstGeom prst="rect">
+            <a:avLst/>
+          </a:prstGeom>
+          <a:noFill/>
+        </p:spPr>
+        <p:txBody>
+          <a:bodyPr wrap="square">
+            <a:spAutoFit/>
+          </a:bodyPr>
+          <a:lstStyle/>
+          <a:p>
+            <a:pPr>
+              <a:defRPr sz="1000" b="1">
+                <a:solidFill>
+                  <a:srgbClr val="2563EB"/>
+                </a:solidFill>
+              </a:defRPr>
+            </a:pPr>
+            <a:r>
+              <a:t>SMARTINTERVIEW — ACADEMIC VIVA &amp; TECHNICAL DEFENSE</a:t>
+            </a:r>
+          </a:p>
+        </p:txBody>
+      </p:sp>
+      <p:sp>
+        <p:nvSpPr>
+          <p:cNvPr id="3" name="TextBox 2"/>
+          <p:cNvSpPr txBox="1"/>
+          <p:nvPr/>
+        </p:nvSpPr>
+        <p:spPr>
+          <a:xfrm>
+            <a:off x="731520" y="640080"/>
+            <a:ext cx="10698480" cy="731520"/>
+          </a:xfrm>
+          <a:prstGeom prst="rect">
+            <a:avLst/>
+          </a:prstGeom>
+          <a:noFill/>
+        </p:spPr>
+        <p:txBody>
+          <a:bodyPr wrap="square">
+            <a:spAutoFit/>
+          </a:bodyPr>
+          <a:lstStyle/>
+          <a:p>
+            <a:pPr>
+              <a:defRPr sz="2600" b="1">
                 <a:solidFill>
                   <a:srgbClr val="1A365D"/>
                 </a:solidFill>
               </a:defRPr>
             </a:pPr>
             <a:r>
-              <a:t>Core Workflow &amp; Context Ingestion</a:t>
-            </a:r>
-          </a:p>
-        </p:txBody>
-      </p:sp>
-      <p:sp>
-        <p:nvSpPr>
-          <p:cNvPr id="3" name="Content Placeholder 2"/>
-          <p:cNvSpPr>
-            <a:spLocks noGrp="1"/>
-          </p:cNvSpPr>
-          <p:nvPr>
-            <p:ph idx="1"/>
-          </p:nvPr>
-        </p:nvSpPr>
-        <p:spPr/>
-        <p:txBody>
-          <a:bodyPr wrap="square"/>
-          <a:lstStyle/>
-          <a:p>
-            <a:pPr>
-              <a:spcAft>
-                <a:spcPts val="800"/>
-              </a:spcAft>
-              <a:defRPr b="1" sz="1800">
-                <a:solidFill>
-                  <a:srgbClr val="2B6CB0"/>
-                </a:solidFill>
-              </a:defRPr>
-            </a:pPr>
-            <a:r>
-              <a:t>Personalized Technical Staging Pipeline:</a:t>
-            </a:r>
-          </a:p>
-          <a:p>
-            <a:pPr>
-              <a:spcAft>
-                <a:spcPts val="600"/>
-              </a:spcAft>
-              <a:defRPr sz="1700"/>
-            </a:pPr>
-            <a:r>
-              <a:t>• Document Ingestion: Candidate uploads Resume (PDF) and target Job Description (or Syllabus).</a:t>
-            </a:r>
-          </a:p>
-          <a:p>
-            <a:pPr>
-              <a:spcAft>
-                <a:spcPts val="600"/>
-              </a:spcAft>
-              <a:defRPr sz="1700"/>
-            </a:pPr>
-            <a:r>
-              <a:t>• Deterministic Extraction: PyMuPDF isolates technical competencies and experience entities.</a:t>
-            </a:r>
-          </a:p>
-          <a:p>
-            <a:pPr>
-              <a:spcAft>
-                <a:spcPts val="600"/>
-              </a:spcAft>
-              <a:defRPr sz="1700"/>
-            </a:pPr>
-            <a:r>
-              <a:t>• Set-Theoretic Skill Gap Analysis:</a:t>
+              <a:t>Core Workflow &amp; Context Ingestion Pipeline</a:t>
+            </a:r>
+          </a:p>
+        </p:txBody>
+      </p:sp>
+      <p:sp>
+        <p:nvSpPr>
+          <p:cNvPr id="4" name="TextBox 3"/>
+          <p:cNvSpPr txBox="1"/>
+          <p:nvPr/>
+        </p:nvSpPr>
+        <p:spPr>
+          <a:xfrm>
+            <a:off x="731520" y="1371600"/>
+            <a:ext cx="5303520" cy="5029200"/>
+          </a:xfrm>
+          <a:prstGeom prst="rect">
+            <a:avLst/>
+          </a:prstGeom>
+          <a:noFill/>
+        </p:spPr>
+        <p:txBody>
+          <a:bodyPr wrap="square">
+            <a:spAutoFit/>
+          </a:bodyPr>
+          <a:lstStyle/>
+          <a:p>
+            <a:pPr>
+              <a:spcAft>
+                <a:spcPts val="600"/>
+              </a:spcAft>
+              <a:defRPr b="1" sz="1600">
+                <a:solidFill>
+                  <a:srgbClr val="2563EB"/>
+                </a:solidFill>
+              </a:defRPr>
+            </a:pPr>
+            <a:r>
+              <a:t>Personalized Technical Staging Loop:</a:t>
+            </a:r>
+          </a:p>
+          <a:p>
+            <a:pPr>
+              <a:spcAft>
+                <a:spcPts val="600"/>
+              </a:spcAft>
+              <a:defRPr sz="1500">
+                <a:solidFill>
+                  <a:srgbClr val="1E293B"/>
+                </a:solidFill>
+              </a:defRPr>
+            </a:pPr>
+            <a:r>
+              <a:t>• 1. Document Extraction &amp; Entity Recognition:</a:t>
             </a:r>
           </a:p>
           <a:p>
@@ -4025,10 +5730,14 @@
               <a:spcAft>
                 <a:spcPts val="400"/>
               </a:spcAft>
-              <a:defRPr sz="1500"/>
-            </a:pPr>
-            <a:r>
-              <a:t>- Group A (Role Overlap): Skills present in both Resume &amp; JD -&gt; Targeted for verification.</a:t>
+              <a:defRPr sz="1300">
+                <a:solidFill>
+                  <a:srgbClr val="1E293B"/>
+                </a:solidFill>
+              </a:defRPr>
+            </a:pPr>
+            <a:r>
+              <a:t>- PyMuPDF parses candidate Resume and target Job Description.</a:t>
             </a:r>
           </a:p>
           <a:p>
@@ -4036,25 +5745,192 @@
               <a:spcAft>
                 <a:spcPts val="400"/>
               </a:spcAft>
-              <a:defRPr sz="1500"/>
-            </a:pPr>
-            <a:r>
-              <a:t>- Group B (Role Gaps): Skills required by JD but missing in Resume -&gt; Targeted for adaptability.</a:t>
-            </a:r>
-          </a:p>
-          <a:p>
-            <a:pPr>
-              <a:spcAft>
-                <a:spcPts val="600"/>
-              </a:spcAft>
-              <a:defRPr sz="1700"/>
-            </a:pPr>
-            <a:r>
-              <a:t>• Targeted Staging: The interview dynamically focuses on validating Group A and bridging Group B.</a:t>
-            </a:r>
-          </a:p>
-        </p:txBody>
-      </p:sp>
+              <a:defRPr sz="1300">
+                <a:solidFill>
+                  <a:srgbClr val="1E293B"/>
+                </a:solidFill>
+              </a:defRPr>
+            </a:pPr>
+            <a:r>
+              <a:t>- Regex filters isolate technical skills and project details.</a:t>
+            </a:r>
+          </a:p>
+          <a:p>
+            <a:pPr>
+              <a:spcAft>
+                <a:spcPts val="600"/>
+              </a:spcAft>
+              <a:defRPr sz="1500">
+                <a:solidFill>
+                  <a:srgbClr val="1E293B"/>
+                </a:solidFill>
+              </a:defRPr>
+            </a:pPr>
+            <a:r>
+              <a:t>• 2. Set-Theoretic Skill Gap Analysis:</a:t>
+            </a:r>
+          </a:p>
+          <a:p>
+            <a:pPr lvl="1">
+              <a:spcAft>
+                <a:spcPts val="400"/>
+              </a:spcAft>
+              <a:defRPr sz="1300">
+                <a:solidFill>
+                  <a:srgbClr val="1E293B"/>
+                </a:solidFill>
+              </a:defRPr>
+            </a:pPr>
+            <a:r>
+              <a:t>- Group A (Role Overlap): Skills present in both Resume &amp; JD.</a:t>
+            </a:r>
+          </a:p>
+          <a:p>
+            <a:pPr lvl="1">
+              <a:spcAft>
+                <a:spcPts val="400"/>
+              </a:spcAft>
+              <a:defRPr sz="1300">
+                <a:solidFill>
+                  <a:srgbClr val="1E293B"/>
+                </a:solidFill>
+              </a:defRPr>
+            </a:pPr>
+            <a:r>
+              <a:t>- Group B (Role Gaps): Skills required by JD but missing in Resume.</a:t>
+            </a:r>
+          </a:p>
+          <a:p>
+            <a:pPr>
+              <a:spcAft>
+                <a:spcPts val="600"/>
+              </a:spcAft>
+              <a:defRPr sz="1500">
+                <a:solidFill>
+                  <a:srgbClr val="1E293B"/>
+                </a:solidFill>
+              </a:defRPr>
+            </a:pPr>
+            <a:r>
+              <a:t>• 3. Adaptive Question Selection:</a:t>
+            </a:r>
+          </a:p>
+          <a:p>
+            <a:pPr lvl="1">
+              <a:spcAft>
+                <a:spcPts val="400"/>
+              </a:spcAft>
+              <a:defRPr sz="1300">
+                <a:solidFill>
+                  <a:srgbClr val="1E293B"/>
+                </a:solidFill>
+              </a:defRPr>
+            </a:pPr>
+            <a:r>
+              <a:t>- Grounds query context in verified knowledge chunks.</a:t>
+            </a:r>
+          </a:p>
+          <a:p>
+            <a:pPr lvl="1">
+              <a:spcAft>
+                <a:spcPts val="400"/>
+              </a:spcAft>
+              <a:defRPr sz="1300">
+                <a:solidFill>
+                  <a:srgbClr val="1E293B"/>
+                </a:solidFill>
+              </a:defRPr>
+            </a:pPr>
+            <a:r>
+              <a:t>- Tests Group A for depth and Group B for adaptability.</a:t>
+            </a:r>
+          </a:p>
+          <a:p>
+            <a:pPr>
+              <a:spcAft>
+                <a:spcPts val="600"/>
+              </a:spcAft>
+              <a:defRPr sz="1500">
+                <a:solidFill>
+                  <a:srgbClr val="1E293B"/>
+                </a:solidFill>
+              </a:defRPr>
+            </a:pPr>
+            <a:r>
+              <a:t>• 4. Audio Transcription &amp; 5-Signal Evaluation:</a:t>
+            </a:r>
+          </a:p>
+          <a:p>
+            <a:pPr lvl="1">
+              <a:spcAft>
+                <a:spcPts val="400"/>
+              </a:spcAft>
+              <a:defRPr sz="1300">
+                <a:solidFill>
+                  <a:srgbClr val="1E293B"/>
+                </a:solidFill>
+              </a:defRPr>
+            </a:pPr>
+            <a:r>
+              <a:t>- Speech captured via Whisper, evaluated across 5 metrics.</a:t>
+            </a:r>
+          </a:p>
+          <a:p>
+            <a:pPr>
+              <a:spcAft>
+                <a:spcPts val="600"/>
+              </a:spcAft>
+              <a:defRPr sz="1500">
+                <a:solidFill>
+                  <a:srgbClr val="1E293B"/>
+                </a:solidFill>
+              </a:defRPr>
+            </a:pPr>
+            <a:r>
+              <a:t>• 5. Bloom State Machine Progression:</a:t>
+            </a:r>
+          </a:p>
+          <a:p>
+            <a:pPr lvl="1">
+              <a:spcAft>
+                <a:spcPts val="400"/>
+              </a:spcAft>
+              <a:defRPr sz="1300">
+                <a:solidFill>
+                  <a:srgbClr val="1E293B"/>
+                </a:solidFill>
+              </a:defRPr>
+            </a:pPr>
+            <a:r>
+              <a:t>- Scores &gt;= 80% advance level; scores &lt; 50% trigger remediation.</a:t>
+            </a:r>
+          </a:p>
+        </p:txBody>
+      </p:sp>
+      <p:pic>
+        <p:nvPicPr>
+          <p:cNvPr id="5" name="Picture 4" descr="Workflow.png"/>
+          <p:cNvPicPr>
+            <a:picLocks noChangeAspect="1"/>
+          </p:cNvPicPr>
+          <p:nvPr/>
+        </p:nvPicPr>
+        <p:blipFill>
+          <a:blip r:embed="rId2"/>
+          <a:stretch>
+            <a:fillRect/>
+          </a:stretch>
+        </p:blipFill>
+        <p:spPr>
+          <a:xfrm>
+            <a:off x="6492240" y="1463040"/>
+            <a:ext cx="5120640" cy="4227141"/>
+          </a:xfrm>
+          <a:prstGeom prst="rect">
+            <a:avLst/>
+          </a:prstGeom>
+        </p:spPr>
+      </p:pic>
     </p:spTree>
   </p:cSld>
   <p:clrMapOvr>
@@ -4075,140 +5951,303 @@
       <p:grpSpPr/>
       <p:sp>
         <p:nvSpPr>
-          <p:cNvPr id="2" name="Title 1"/>
-          <p:cNvSpPr>
-            <a:spLocks noGrp="1"/>
-          </p:cNvSpPr>
-          <p:nvPr>
-            <p:ph type="title"/>
-          </p:nvPr>
-        </p:nvSpPr>
-        <p:spPr/>
-        <p:txBody>
-          <a:bodyPr/>
-          <a:lstStyle/>
-          <a:p>
-            <a:pPr>
-              <a:defRPr sz="2800" b="1">
+          <p:cNvPr id="2" name="TextBox 1"/>
+          <p:cNvSpPr txBox="1"/>
+          <p:nvPr/>
+        </p:nvSpPr>
+        <p:spPr>
+          <a:xfrm>
+            <a:off x="731520" y="365760"/>
+            <a:ext cx="10698480" cy="365760"/>
+          </a:xfrm>
+          <a:prstGeom prst="rect">
+            <a:avLst/>
+          </a:prstGeom>
+          <a:noFill/>
+        </p:spPr>
+        <p:txBody>
+          <a:bodyPr wrap="square">
+            <a:spAutoFit/>
+          </a:bodyPr>
+          <a:lstStyle/>
+          <a:p>
+            <a:pPr>
+              <a:defRPr sz="1000" b="1">
+                <a:solidFill>
+                  <a:srgbClr val="2563EB"/>
+                </a:solidFill>
+              </a:defRPr>
+            </a:pPr>
+            <a:r>
+              <a:t>SMARTINTERVIEW — ACADEMIC VIVA &amp; TECHNICAL DEFENSE</a:t>
+            </a:r>
+          </a:p>
+        </p:txBody>
+      </p:sp>
+      <p:sp>
+        <p:nvSpPr>
+          <p:cNvPr id="3" name="TextBox 2"/>
+          <p:cNvSpPr txBox="1"/>
+          <p:nvPr/>
+        </p:nvSpPr>
+        <p:spPr>
+          <a:xfrm>
+            <a:off x="731520" y="640080"/>
+            <a:ext cx="10698480" cy="731520"/>
+          </a:xfrm>
+          <a:prstGeom prst="rect">
+            <a:avLst/>
+          </a:prstGeom>
+          <a:noFill/>
+        </p:spPr>
+        <p:txBody>
+          <a:bodyPr wrap="square">
+            <a:spAutoFit/>
+          </a:bodyPr>
+          <a:lstStyle/>
+          <a:p>
+            <a:pPr>
+              <a:defRPr sz="2600" b="1">
                 <a:solidFill>
                   <a:srgbClr val="1A365D"/>
                 </a:solidFill>
               </a:defRPr>
             </a:pPr>
             <a:r>
-              <a:t>RAG Grounding: Eliminating Hallucinations</a:t>
-            </a:r>
-          </a:p>
-        </p:txBody>
-      </p:sp>
-      <p:sp>
-        <p:nvSpPr>
-          <p:cNvPr id="3" name="Content Placeholder 2"/>
-          <p:cNvSpPr>
-            <a:spLocks noGrp="1"/>
-          </p:cNvSpPr>
-          <p:nvPr>
-            <p:ph idx="1"/>
-          </p:nvPr>
-        </p:nvSpPr>
-        <p:spPr/>
-        <p:txBody>
-          <a:bodyPr wrap="square"/>
-          <a:lstStyle/>
-          <a:p>
-            <a:pPr>
-              <a:spcAft>
-                <a:spcPts val="800"/>
-              </a:spcAft>
-              <a:defRPr b="1" sz="1800">
-                <a:solidFill>
-                  <a:srgbClr val="2B6CB0"/>
-                </a:solidFill>
-              </a:defRPr>
-            </a:pPr>
-            <a:r>
-              <a:t>Knowledge Base Architecture:</a:t>
-            </a:r>
-          </a:p>
-          <a:p>
-            <a:pPr>
-              <a:spcAft>
-                <a:spcPts val="600"/>
-              </a:spcAft>
-              <a:defRPr sz="1700"/>
-            </a:pPr>
-            <a:r>
-              <a:t>• Curated repository of exactly 402 validated CS chunks across 50 concepts in 8 core domains (DSA, DBMS, OS, CN, System Design, OOP, Design Patterns, ML/DL).</a:t>
-            </a:r>
-          </a:p>
-          <a:p>
-            <a:pPr>
-              <a:spcAft>
-                <a:spcPts val="800"/>
-              </a:spcAft>
-              <a:defRPr b="1" sz="1800">
-                <a:solidFill>
-                  <a:srgbClr val="2B6CB0"/>
-                </a:solidFill>
-              </a:defRPr>
-            </a:pPr>
-            <a:r>
-              <a:t>Empirical Retrieval Benchmarks (33 Technical Domain Queries):</a:t>
-            </a:r>
-          </a:p>
-          <a:p>
-            <a:pPr>
-              <a:spcAft>
-                <a:spcPts val="600"/>
-              </a:spcAft>
-              <a:defRPr sz="1700"/>
-            </a:pPr>
-            <a:r>
-              <a:t>• Hit@1 = 96.97% (Top retrieved chunk is the exact ground-truth answer key).</a:t>
-            </a:r>
-          </a:p>
-          <a:p>
-            <a:pPr>
-              <a:spcAft>
-                <a:spcPts val="600"/>
-              </a:spcAft>
-              <a:defRPr sz="1700"/>
-            </a:pPr>
-            <a:r>
-              <a:t>• Hit@3 = 100.00% (Correct technical reference chunk guaranteed in top 3).</a:t>
-            </a:r>
-          </a:p>
-          <a:p>
-            <a:pPr>
-              <a:spcAft>
-                <a:spcPts val="600"/>
-              </a:spcAft>
-              <a:defRPr sz="1700"/>
-            </a:pPr>
-            <a:r>
-              <a:t>• Mean Reciprocal Rank (MRR) = 0.9798 (Near-perfect ranking precision).</a:t>
-            </a:r>
-          </a:p>
-          <a:p>
-            <a:pPr>
-              <a:spcAft>
-                <a:spcPts val="600"/>
-              </a:spcAft>
-              <a:defRPr sz="1700"/>
-            </a:pPr>
-            <a:r>
-              <a:t>• Retrieval Latency = 24.6 ms (Sub-100ms vector search via local ChromaDB HNSW).</a:t>
-            </a:r>
-          </a:p>
-          <a:p>
-            <a:pPr>
-              <a:spcAft>
-                <a:spcPts val="600"/>
-              </a:spcAft>
-              <a:defRPr sz="1700"/>
-            </a:pPr>
-            <a:r>
-              <a:t>• Result: Zero ungrounded algorithmic or framework hallucinations.</a:t>
+              <a:t>Hybrid Graph RAG Engine: Multi-Signal Retrieval</a:t>
+            </a:r>
+          </a:p>
+        </p:txBody>
+      </p:sp>
+      <p:sp>
+        <p:nvSpPr>
+          <p:cNvPr id="4" name="TextBox 3"/>
+          <p:cNvSpPr txBox="1"/>
+          <p:nvPr/>
+        </p:nvSpPr>
+        <p:spPr>
+          <a:xfrm>
+            <a:off x="731520" y="1371600"/>
+            <a:ext cx="10698480" cy="5029200"/>
+          </a:xfrm>
+          <a:prstGeom prst="rect">
+            <a:avLst/>
+          </a:prstGeom>
+          <a:noFill/>
+        </p:spPr>
+        <p:txBody>
+          <a:bodyPr wrap="square">
+            <a:spAutoFit/>
+          </a:bodyPr>
+          <a:lstStyle/>
+          <a:p>
+            <a:pPr>
+              <a:spcAft>
+                <a:spcPts val="600"/>
+              </a:spcAft>
+              <a:defRPr b="1" sz="1600">
+                <a:solidFill>
+                  <a:srgbClr val="2563EB"/>
+                </a:solidFill>
+              </a:defRPr>
+            </a:pPr>
+            <a:r>
+              <a:t>Why Vanilla Vector Search Fails:</a:t>
+            </a:r>
+          </a:p>
+          <a:p>
+            <a:pPr>
+              <a:spcAft>
+                <a:spcPts val="600"/>
+              </a:spcAft>
+              <a:defRPr sz="1500">
+                <a:solidFill>
+                  <a:srgbClr val="1E293B"/>
+                </a:solidFill>
+              </a:defRPr>
+            </a:pPr>
+            <a:r>
+              <a:t>• Dense vectors capture broad semantic similarity but miss exact acronyms (e.g. 2PL, ACID, B-Tree).</a:t>
+            </a:r>
+          </a:p>
+          <a:p>
+            <a:pPr>
+              <a:spcAft>
+                <a:spcPts val="600"/>
+              </a:spcAft>
+              <a:defRPr sz="1500">
+                <a:solidFill>
+                  <a:srgbClr val="1E293B"/>
+                </a:solidFill>
+              </a:defRPr>
+            </a:pPr>
+            <a:r>
+              <a:t>• Dense search cannot trace prerequisite concept hierarchies (e.g., Locks -&gt; Concurrency -&gt; Transactions).</a:t>
+            </a:r>
+          </a:p>
+          <a:p>
+            <a:pPr>
+              <a:spcAft>
+                <a:spcPts val="600"/>
+              </a:spcAft>
+              <a:defRPr b="1" sz="1600">
+                <a:solidFill>
+                  <a:srgbClr val="2563EB"/>
+                </a:solidFill>
+              </a:defRPr>
+            </a:pPr>
+            <a:r>
+              <a:t>Tri-Retrieval Architecture &amp; Fusion:</a:t>
+            </a:r>
+          </a:p>
+          <a:p>
+            <a:pPr>
+              <a:spcAft>
+                <a:spcPts val="600"/>
+              </a:spcAft>
+              <a:defRPr sz="1500">
+                <a:solidFill>
+                  <a:srgbClr val="1E293B"/>
+                </a:solidFill>
+              </a:defRPr>
+            </a:pPr>
+            <a:r>
+              <a:t>• 1. Dense Semantic Retrieval (ChromaDB + all-MiniLM-L6-v2):</a:t>
+            </a:r>
+          </a:p>
+          <a:p>
+            <a:pPr lvl="1">
+              <a:spcAft>
+                <a:spcPts val="400"/>
+              </a:spcAft>
+              <a:defRPr sz="1300">
+                <a:solidFill>
+                  <a:srgbClr val="1E293B"/>
+                </a:solidFill>
+              </a:defRPr>
+            </a:pPr>
+            <a:r>
+              <a:t>- 384-dimensional cosine index across 402 curated CS topic chunks in 8 domains.</a:t>
+            </a:r>
+          </a:p>
+          <a:p>
+            <a:pPr>
+              <a:spcAft>
+                <a:spcPts val="600"/>
+              </a:spcAft>
+              <a:defRPr sz="1500">
+                <a:solidFill>
+                  <a:srgbClr val="1E293B"/>
+                </a:solidFill>
+              </a:defRPr>
+            </a:pPr>
+            <a:r>
+              <a:t>• 2. Lexical Keyword Retrieval (BM25Okapi):</a:t>
+            </a:r>
+          </a:p>
+          <a:p>
+            <a:pPr lvl="1">
+              <a:spcAft>
+                <a:spcPts val="400"/>
+              </a:spcAft>
+              <a:defRPr sz="1300">
+                <a:solidFill>
+                  <a:srgbClr val="1E293B"/>
+                </a:solidFill>
+              </a:defRPr>
+            </a:pPr>
+            <a:r>
+              <a:t>- Deterministic exact token matching for algorithms, symbols, and architectural terms.</a:t>
+            </a:r>
+          </a:p>
+          <a:p>
+            <a:pPr>
+              <a:spcAft>
+                <a:spcPts val="600"/>
+              </a:spcAft>
+              <a:defRPr sz="1500">
+                <a:solidFill>
+                  <a:srgbClr val="1E293B"/>
+                </a:solidFill>
+              </a:defRPr>
+            </a:pPr>
+            <a:r>
+              <a:t>• 3. Knowledge Graph Traversal (NetworkX In-Memory / Neo4j):</a:t>
+            </a:r>
+          </a:p>
+          <a:p>
+            <a:pPr lvl="1">
+              <a:spcAft>
+                <a:spcPts val="400"/>
+              </a:spcAft>
+              <a:defRPr sz="1300">
+                <a:solidFill>
+                  <a:srgbClr val="1E293B"/>
+                </a:solidFill>
+              </a:defRPr>
+            </a:pPr>
+            <a:r>
+              <a:t>- Directed ontology of 50 CS concepts, prerequisite edges, and Bloom cognitive depths.</a:t>
+            </a:r>
+          </a:p>
+          <a:p>
+            <a:pPr>
+              <a:spcAft>
+                <a:spcPts val="600"/>
+              </a:spcAft>
+              <a:defRPr sz="1500">
+                <a:solidFill>
+                  <a:srgbClr val="1E293B"/>
+                </a:solidFill>
+              </a:defRPr>
+            </a:pPr>
+            <a:r>
+              <a:t>• Reciprocal Rank Fusion (RRF, k=60):</a:t>
+            </a:r>
+          </a:p>
+          <a:p>
+            <a:pPr lvl="1">
+              <a:spcAft>
+                <a:spcPts val="400"/>
+              </a:spcAft>
+              <a:defRPr sz="1300">
+                <a:solidFill>
+                  <a:srgbClr val="1E293B"/>
+                </a:solidFill>
+              </a:defRPr>
+            </a:pPr>
+            <a:r>
+              <a:t>- Combines rankings via RRF(d) = sum(1 / (k + rank_i(d))) with canonical chunk deduplication.</a:t>
+            </a:r>
+          </a:p>
+          <a:p>
+            <a:pPr>
+              <a:spcAft>
+                <a:spcPts val="600"/>
+              </a:spcAft>
+              <a:defRPr b="1" sz="1600">
+                <a:solidFill>
+                  <a:srgbClr val="2563EB"/>
+                </a:solidFill>
+              </a:defRPr>
+            </a:pPr>
+            <a:r>
+              <a:t>Empirical Benchmark Results (33 Domain Test Queries):</a:t>
+            </a:r>
+          </a:p>
+          <a:p>
+            <a:pPr>
+              <a:spcAft>
+                <a:spcPts val="600"/>
+              </a:spcAft>
+              <a:defRPr sz="1500">
+                <a:solidFill>
+                  <a:srgbClr val="1E293B"/>
+                </a:solidFill>
+              </a:defRPr>
+            </a:pPr>
+            <a:r>
+              <a:t>• Hit@1 = 96.97% | Hit@3 = 100.00% | Mean Reciprocal Rank (MRR) = 0.9798 | Retrieval Latency = 24.6 ms.</a:t>
             </a:r>
           </a:p>
         </p:txBody>
@@ -4233,144 +6272,331 @@
       <p:grpSpPr/>
       <p:sp>
         <p:nvSpPr>
-          <p:cNvPr id="2" name="Title 1"/>
-          <p:cNvSpPr>
-            <a:spLocks noGrp="1"/>
-          </p:cNvSpPr>
-          <p:nvPr>
-            <p:ph type="title"/>
-          </p:nvPr>
-        </p:nvSpPr>
-        <p:spPr/>
-        <p:txBody>
-          <a:bodyPr/>
-          <a:lstStyle/>
-          <a:p>
-            <a:pPr>
-              <a:defRPr sz="2800" b="1">
+          <p:cNvPr id="2" name="TextBox 1"/>
+          <p:cNvSpPr txBox="1"/>
+          <p:nvPr/>
+        </p:nvSpPr>
+        <p:spPr>
+          <a:xfrm>
+            <a:off x="731520" y="365760"/>
+            <a:ext cx="10698480" cy="365760"/>
+          </a:xfrm>
+          <a:prstGeom prst="rect">
+            <a:avLst/>
+          </a:prstGeom>
+          <a:noFill/>
+        </p:spPr>
+        <p:txBody>
+          <a:bodyPr wrap="square">
+            <a:spAutoFit/>
+          </a:bodyPr>
+          <a:lstStyle/>
+          <a:p>
+            <a:pPr>
+              <a:defRPr sz="1000" b="1">
+                <a:solidFill>
+                  <a:srgbClr val="2563EB"/>
+                </a:solidFill>
+              </a:defRPr>
+            </a:pPr>
+            <a:r>
+              <a:t>SMARTINTERVIEW — ACADEMIC VIVA &amp; TECHNICAL DEFENSE</a:t>
+            </a:r>
+          </a:p>
+        </p:txBody>
+      </p:sp>
+      <p:sp>
+        <p:nvSpPr>
+          <p:cNvPr id="3" name="TextBox 2"/>
+          <p:cNvSpPr txBox="1"/>
+          <p:nvPr/>
+        </p:nvSpPr>
+        <p:spPr>
+          <a:xfrm>
+            <a:off x="731520" y="640080"/>
+            <a:ext cx="10698480" cy="731520"/>
+          </a:xfrm>
+          <a:prstGeom prst="rect">
+            <a:avLst/>
+          </a:prstGeom>
+          <a:noFill/>
+        </p:spPr>
+        <p:txBody>
+          <a:bodyPr wrap="square">
+            <a:spAutoFit/>
+          </a:bodyPr>
+          <a:lstStyle/>
+          <a:p>
+            <a:pPr>
+              <a:defRPr sz="2600" b="1">
                 <a:solidFill>
                   <a:srgbClr val="1A365D"/>
                 </a:solidFill>
               </a:defRPr>
             </a:pPr>
             <a:r>
-              <a:t>Deterministic Adaptive Engine (Bloom's Taxonomy)</a:t>
-            </a:r>
-          </a:p>
-        </p:txBody>
-      </p:sp>
-      <p:sp>
-        <p:nvSpPr>
-          <p:cNvPr id="3" name="Content Placeholder 2"/>
-          <p:cNvSpPr>
-            <a:spLocks noGrp="1"/>
-          </p:cNvSpPr>
-          <p:nvPr>
-            <p:ph idx="1"/>
-          </p:nvPr>
-        </p:nvSpPr>
-        <p:spPr/>
-        <p:txBody>
-          <a:bodyPr wrap="square"/>
-          <a:lstStyle/>
-          <a:p>
-            <a:pPr>
-              <a:spcAft>
-                <a:spcPts val="800"/>
-              </a:spcAft>
-              <a:defRPr b="1" sz="1800">
-                <a:solidFill>
-                  <a:srgbClr val="2B6CB0"/>
-                </a:solidFill>
-              </a:defRPr>
-            </a:pPr>
-            <a:r>
-              <a:t>Pedagogical Cognitive Scaffolding (Python State Machine):</a:t>
-            </a:r>
-          </a:p>
-          <a:p>
-            <a:pPr>
-              <a:spcAft>
-                <a:spcPts val="600"/>
-              </a:spcAft>
-              <a:defRPr sz="1700"/>
-            </a:pPr>
-            <a:r>
-              <a:t>• Maps questions strictly across Bloom's Revised Taxonomy:</a:t>
-            </a:r>
-          </a:p>
-          <a:p>
-            <a:pPr>
-              <a:spcAft>
-                <a:spcPts val="600"/>
-              </a:spcAft>
-              <a:defRPr sz="1600"/>
-            </a:pPr>
-            <a:r>
-              <a:t>Remember (L1) -&gt; Understand (L2) -&gt; Apply (L3) -&gt; Analyze (L4) -&gt; Evaluate (L5) -&gt; Create (L6).</a:t>
-            </a:r>
-          </a:p>
-          <a:p>
-            <a:pPr>
-              <a:spcAft>
-                <a:spcPts val="800"/>
-              </a:spcAft>
-              <a:defRPr b="1" sz="1800">
-                <a:solidFill>
-                  <a:srgbClr val="2B6CB0"/>
-                </a:solidFill>
-              </a:defRPr>
-            </a:pPr>
-            <a:r>
-              <a:t>Deterministic Transition Rules:</a:t>
-            </a:r>
-          </a:p>
-          <a:p>
-            <a:pPr>
-              <a:spcAft>
-                <a:spcPts val="600"/>
-              </a:spcAft>
-              <a:defRPr sz="1700"/>
-            </a:pPr>
-            <a:r>
-              <a:t>• Score &gt;= 80% (Mastery): Advance Bloom cognitive level (+1) or advance difficulty tier.</a:t>
-            </a:r>
-          </a:p>
-          <a:p>
-            <a:pPr>
-              <a:spcAft>
-                <a:spcPts val="600"/>
-              </a:spcAft>
-              <a:defRPr sz="1700"/>
-            </a:pPr>
-            <a:r>
-              <a:t>• Score 50% - 79% (Adequate): Maintain current Bloom level and difficulty tier.</a:t>
-            </a:r>
-          </a:p>
-          <a:p>
-            <a:pPr>
-              <a:spcAft>
-                <a:spcPts val="600"/>
-              </a:spcAft>
-              <a:defRPr sz="1700"/>
-            </a:pPr>
-            <a:r>
-              <a:t>• Score &lt; 50% (Remediation): Regress Bloom level (-1) to rebuild core foundational concepts.</a:t>
-            </a:r>
-          </a:p>
-          <a:p>
-            <a:pPr>
-              <a:spcAft>
-                <a:spcPts val="600"/>
-              </a:spcAft>
-              <a:defRPr sz="1700"/>
-            </a:pPr>
-            <a:r>
-              <a:t>• Weakness-Biased Skill Selection: Automatically samples next questions from lowest-scoring skills.</a:t>
-            </a:r>
-          </a:p>
-        </p:txBody>
-      </p:sp>
+              <a:t>Relational Data Schema &amp; ACID Storage (ERD)</a:t>
+            </a:r>
+          </a:p>
+        </p:txBody>
+      </p:sp>
+      <p:sp>
+        <p:nvSpPr>
+          <p:cNvPr id="4" name="TextBox 3"/>
+          <p:cNvSpPr txBox="1"/>
+          <p:nvPr/>
+        </p:nvSpPr>
+        <p:spPr>
+          <a:xfrm>
+            <a:off x="731520" y="1371600"/>
+            <a:ext cx="5303520" cy="5029200"/>
+          </a:xfrm>
+          <a:prstGeom prst="rect">
+            <a:avLst/>
+          </a:prstGeom>
+          <a:noFill/>
+        </p:spPr>
+        <p:txBody>
+          <a:bodyPr wrap="square">
+            <a:spAutoFit/>
+          </a:bodyPr>
+          <a:lstStyle/>
+          <a:p>
+            <a:pPr>
+              <a:spcAft>
+                <a:spcPts val="600"/>
+              </a:spcAft>
+              <a:defRPr b="1" sz="1600">
+                <a:solidFill>
+                  <a:srgbClr val="2563EB"/>
+                </a:solidFill>
+              </a:defRPr>
+            </a:pPr>
+            <a:r>
+              <a:t>Robust 7-Table Relational Schema (MySQL 8.0):</a:t>
+            </a:r>
+          </a:p>
+          <a:p>
+            <a:pPr>
+              <a:spcAft>
+                <a:spcPts val="600"/>
+              </a:spcAft>
+              <a:defRPr sz="1500">
+                <a:solidFill>
+                  <a:srgbClr val="1E293B"/>
+                </a:solidFill>
+              </a:defRPr>
+            </a:pPr>
+            <a:r>
+              <a:t>• `users`: Candidate identity, bcrypt password hash.</a:t>
+            </a:r>
+          </a:p>
+          <a:p>
+            <a:pPr>
+              <a:spcAft>
+                <a:spcPts val="600"/>
+              </a:spcAft>
+              <a:defRPr sz="1500">
+                <a:solidFill>
+                  <a:srgbClr val="1E293B"/>
+                </a:solidFill>
+              </a:defRPr>
+            </a:pPr>
+            <a:r>
+              <a:t>• `resumes`: PyMuPDF parsed skills, work experience, education.</a:t>
+            </a:r>
+          </a:p>
+          <a:p>
+            <a:pPr>
+              <a:spcAft>
+                <a:spcPts val="600"/>
+              </a:spcAft>
+              <a:defRPr sz="1500">
+                <a:solidFill>
+                  <a:srgbClr val="1E293B"/>
+                </a:solidFill>
+              </a:defRPr>
+            </a:pPr>
+            <a:r>
+              <a:t>• `job_descriptions`: Target JD entities and domain skills.</a:t>
+            </a:r>
+          </a:p>
+          <a:p>
+            <a:pPr>
+              <a:spcAft>
+                <a:spcPts val="600"/>
+              </a:spcAft>
+              <a:defRPr sz="1500">
+                <a:solidFill>
+                  <a:srgbClr val="1E293B"/>
+                </a:solidFill>
+              </a:defRPr>
+            </a:pPr>
+            <a:r>
+              <a:t>• `interview_sessions`:</a:t>
+            </a:r>
+          </a:p>
+          <a:p>
+            <a:pPr lvl="1">
+              <a:spcAft>
+                <a:spcPts val="400"/>
+              </a:spcAft>
+              <a:defRPr sz="1300">
+                <a:solidFill>
+                  <a:srgbClr val="1E293B"/>
+                </a:solidFill>
+              </a:defRPr>
+            </a:pPr>
+            <a:r>
+              <a:t>- Session difficulty, question count, status.</a:t>
+            </a:r>
+          </a:p>
+          <a:p>
+            <a:pPr lvl="1">
+              <a:spcAft>
+                <a:spcPts val="400"/>
+              </a:spcAft>
+              <a:defRPr sz="1300">
+                <a:solidFill>
+                  <a:srgbClr val="1E293B"/>
+                </a:solidFill>
+              </a:defRPr>
+            </a:pPr>
+            <a:r>
+              <a:t>- Serialized `AdaptiveState` JSON &amp; current Bloom level.</a:t>
+            </a:r>
+          </a:p>
+          <a:p>
+            <a:pPr>
+              <a:spcAft>
+                <a:spcPts val="600"/>
+              </a:spcAft>
+              <a:defRPr sz="1500">
+                <a:solidFill>
+                  <a:srgbClr val="1E293B"/>
+                </a:solidFill>
+              </a:defRPr>
+            </a:pPr>
+            <a:r>
+              <a:t>• `interview_questions`: Question text, Bloom tier, skill, RAG chunk.</a:t>
+            </a:r>
+          </a:p>
+          <a:p>
+            <a:pPr>
+              <a:spcAft>
+                <a:spcPts val="600"/>
+              </a:spcAft>
+              <a:defRPr sz="1500">
+                <a:solidFill>
+                  <a:srgbClr val="1E293B"/>
+                </a:solidFill>
+              </a:defRPr>
+            </a:pPr>
+            <a:r>
+              <a:t>• `answers`: Candidate audio transcription and response.</a:t>
+            </a:r>
+          </a:p>
+          <a:p>
+            <a:pPr>
+              <a:spcAft>
+                <a:spcPts val="600"/>
+              </a:spcAft>
+              <a:defRPr sz="1500">
+                <a:solidFill>
+                  <a:srgbClr val="1E293B"/>
+                </a:solidFill>
+              </a:defRPr>
+            </a:pPr>
+            <a:r>
+              <a:t>• `answer_evaluations`: 5-factor mathematical rubric metrics.</a:t>
+            </a:r>
+          </a:p>
+          <a:p>
+            <a:pPr>
+              <a:spcAft>
+                <a:spcPts val="600"/>
+              </a:spcAft>
+              <a:defRPr b="1" sz="1600">
+                <a:solidFill>
+                  <a:srgbClr val="2563EB"/>
+                </a:solidFill>
+              </a:defRPr>
+            </a:pPr>
+            <a:r>
+              <a:t>Database Integrity Guarantees:</a:t>
+            </a:r>
+          </a:p>
+          <a:p>
+            <a:pPr>
+              <a:spcAft>
+                <a:spcPts val="600"/>
+              </a:spcAft>
+              <a:defRPr sz="1500">
+                <a:solidFill>
+                  <a:srgbClr val="1E293B"/>
+                </a:solidFill>
+              </a:defRPr>
+            </a:pPr>
+            <a:r>
+              <a:t>• Foreign keys with CASCADE on session deletion.</a:t>
+            </a:r>
+          </a:p>
+          <a:p>
+            <a:pPr>
+              <a:spcAft>
+                <a:spcPts val="600"/>
+              </a:spcAft>
+              <a:defRPr sz="1500">
+                <a:solidFill>
+                  <a:srgbClr val="1E293B"/>
+                </a:solidFill>
+              </a:defRPr>
+            </a:pPr>
+            <a:r>
+              <a:t>• Strict ACID compliance with InnoDB engine.</a:t>
+            </a:r>
+          </a:p>
+          <a:p>
+            <a:pPr>
+              <a:spcAft>
+                <a:spcPts val="600"/>
+              </a:spcAft>
+              <a:defRPr sz="1500">
+                <a:solidFill>
+                  <a:srgbClr val="1E293B"/>
+                </a:solidFill>
+              </a:defRPr>
+            </a:pPr>
+            <a:r>
+              <a:t>• JSON state serialization prevents mid-session data loss.</a:t>
+            </a:r>
+          </a:p>
+        </p:txBody>
+      </p:sp>
+      <p:pic>
+        <p:nvPicPr>
+          <p:cNvPr id="5" name="Picture 4" descr="ERD.png"/>
+          <p:cNvPicPr>
+            <a:picLocks noChangeAspect="1"/>
+          </p:cNvPicPr>
+          <p:nvPr/>
+        </p:nvPicPr>
+        <p:blipFill>
+          <a:blip r:embed="rId2"/>
+          <a:stretch>
+            <a:fillRect/>
+          </a:stretch>
+        </p:blipFill>
+        <p:spPr>
+          <a:xfrm>
+            <a:off x="7772400" y="1371600"/>
+            <a:ext cx="2286000" cy="5447805"/>
+          </a:xfrm>
+          <a:prstGeom prst="rect">
+            <a:avLst/>
+          </a:prstGeom>
+        </p:spPr>
+      </p:pic>
     </p:spTree>
   </p:cSld>
   <p:clrMapOvr>
@@ -4391,125 +6617,303 @@
       <p:grpSpPr/>
       <p:sp>
         <p:nvSpPr>
-          <p:cNvPr id="2" name="Title 1"/>
-          <p:cNvSpPr>
-            <a:spLocks noGrp="1"/>
-          </p:cNvSpPr>
-          <p:nvPr>
-            <p:ph type="title"/>
-          </p:nvPr>
-        </p:nvSpPr>
-        <p:spPr/>
-        <p:txBody>
-          <a:bodyPr/>
-          <a:lstStyle/>
-          <a:p>
-            <a:pPr>
-              <a:defRPr sz="2800" b="1">
+          <p:cNvPr id="2" name="TextBox 1"/>
+          <p:cNvSpPr txBox="1"/>
+          <p:nvPr/>
+        </p:nvSpPr>
+        <p:spPr>
+          <a:xfrm>
+            <a:off x="731520" y="365760"/>
+            <a:ext cx="10698480" cy="365760"/>
+          </a:xfrm>
+          <a:prstGeom prst="rect">
+            <a:avLst/>
+          </a:prstGeom>
+          <a:noFill/>
+        </p:spPr>
+        <p:txBody>
+          <a:bodyPr wrap="square">
+            <a:spAutoFit/>
+          </a:bodyPr>
+          <a:lstStyle/>
+          <a:p>
+            <a:pPr>
+              <a:defRPr sz="1000" b="1">
+                <a:solidFill>
+                  <a:srgbClr val="2563EB"/>
+                </a:solidFill>
+              </a:defRPr>
+            </a:pPr>
+            <a:r>
+              <a:t>SMARTINTERVIEW — ACADEMIC VIVA &amp; TECHNICAL DEFENSE</a:t>
+            </a:r>
+          </a:p>
+        </p:txBody>
+      </p:sp>
+      <p:sp>
+        <p:nvSpPr>
+          <p:cNvPr id="3" name="TextBox 2"/>
+          <p:cNvSpPr txBox="1"/>
+          <p:nvPr/>
+        </p:nvSpPr>
+        <p:spPr>
+          <a:xfrm>
+            <a:off x="731520" y="640080"/>
+            <a:ext cx="10698480" cy="731520"/>
+          </a:xfrm>
+          <a:prstGeom prst="rect">
+            <a:avLst/>
+          </a:prstGeom>
+          <a:noFill/>
+        </p:spPr>
+        <p:txBody>
+          <a:bodyPr wrap="square">
+            <a:spAutoFit/>
+          </a:bodyPr>
+          <a:lstStyle/>
+          <a:p>
+            <a:pPr>
+              <a:defRPr sz="2600" b="1">
                 <a:solidFill>
                   <a:srgbClr val="1A365D"/>
                 </a:solidFill>
               </a:defRPr>
             </a:pPr>
             <a:r>
-              <a:t>Multi-Signal Evaluation (Eliminating 'Vibe Grading')</a:t>
-            </a:r>
-          </a:p>
-        </p:txBody>
-      </p:sp>
-      <p:sp>
-        <p:nvSpPr>
-          <p:cNvPr id="3" name="Content Placeholder 2"/>
-          <p:cNvSpPr>
-            <a:spLocks noGrp="1"/>
-          </p:cNvSpPr>
-          <p:nvPr>
-            <p:ph idx="1"/>
-          </p:nvPr>
-        </p:nvSpPr>
-        <p:spPr/>
-        <p:txBody>
-          <a:bodyPr wrap="square"/>
-          <a:lstStyle/>
-          <a:p>
-            <a:pPr>
-              <a:spcAft>
-                <a:spcPts val="800"/>
-              </a:spcAft>
-              <a:defRPr b="1" sz="1800">
-                <a:solidFill>
-                  <a:srgbClr val="2B6CB0"/>
-                </a:solidFill>
-              </a:defRPr>
-            </a:pPr>
-            <a:r>
-              <a:t>Objective 5-Part Mathematical Scoring Rubric:</a:t>
-            </a:r>
-          </a:p>
-          <a:p>
-            <a:pPr>
-              <a:spcAft>
-                <a:spcPts val="600"/>
-              </a:spcAft>
-              <a:defRPr sz="1700"/>
-            </a:pPr>
-            <a:r>
-              <a:t>• 30% Technical Correctness: Deep LLM logical reasoning and factual accuracy.</a:t>
-            </a:r>
-          </a:p>
-          <a:p>
-            <a:pPr>
-              <a:spcAft>
-                <a:spcPts val="600"/>
-              </a:spcAft>
-              <a:defRPr sz="1700"/>
-            </a:pPr>
-            <a:r>
-              <a:t>• 20% Completeness: Direct coverage of all question constraints and edge cases.</a:t>
-            </a:r>
-          </a:p>
-          <a:p>
-            <a:pPr>
-              <a:spcAft>
-                <a:spcPts val="600"/>
-              </a:spcAft>
-              <a:defRPr sz="1700"/>
-            </a:pPr>
-            <a:r>
-              <a:t>• 20% Relevance: Focus, conciseness, and elimination of conversational filler.</a:t>
-            </a:r>
-          </a:p>
-          <a:p>
-            <a:pPr>
-              <a:spcAft>
-                <a:spcPts val="600"/>
-              </a:spcAft>
-              <a:defRPr sz="1700"/>
-            </a:pPr>
-            <a:r>
-              <a:t>• 15% Semantic Cosine Similarity: Sentence-BERT (all-MiniLM-L6-v2) matching against ground truth.</a:t>
-            </a:r>
-          </a:p>
-          <a:p>
-            <a:pPr>
-              <a:spcAft>
-                <a:spcPts val="600"/>
-              </a:spcAft>
-              <a:defRPr sz="1700"/>
-            </a:pPr>
-            <a:r>
-              <a:t>• 15% Explicit Concept Coverage: Deterministic keyword &amp; technical entity detection.</a:t>
-            </a:r>
-          </a:p>
-          <a:p>
-            <a:pPr>
-              <a:spcAft>
-                <a:spcPts val="600"/>
-              </a:spcAft>
-              <a:defRPr sz="1600"/>
-            </a:pPr>
-            <a:r>
-              <a:t>Why This Split? Blends semantic understanding with hard concept verification, ensuring reproducible, unbiased scoring immune to prompt drift.</a:t>
+              <a:t>Deterministic Cognitive Scaffolding (Bloom's Taxonomy)</a:t>
+            </a:r>
+          </a:p>
+        </p:txBody>
+      </p:sp>
+      <p:sp>
+        <p:nvSpPr>
+          <p:cNvPr id="4" name="TextBox 3"/>
+          <p:cNvSpPr txBox="1"/>
+          <p:nvPr/>
+        </p:nvSpPr>
+        <p:spPr>
+          <a:xfrm>
+            <a:off x="731520" y="1371600"/>
+            <a:ext cx="10698480" cy="5029200"/>
+          </a:xfrm>
+          <a:prstGeom prst="rect">
+            <a:avLst/>
+          </a:prstGeom>
+          <a:noFill/>
+        </p:spPr>
+        <p:txBody>
+          <a:bodyPr wrap="square">
+            <a:spAutoFit/>
+          </a:bodyPr>
+          <a:lstStyle/>
+          <a:p>
+            <a:pPr>
+              <a:spcAft>
+                <a:spcPts val="600"/>
+              </a:spcAft>
+              <a:defRPr b="1" sz="1600">
+                <a:solidFill>
+                  <a:srgbClr val="2563EB"/>
+                </a:solidFill>
+              </a:defRPr>
+            </a:pPr>
+            <a:r>
+              <a:t>Strict Pedagogical Progression (Replacing Arbitrary LLM Difficulty):</a:t>
+            </a:r>
+          </a:p>
+          <a:p>
+            <a:pPr>
+              <a:spcAft>
+                <a:spcPts val="600"/>
+              </a:spcAft>
+              <a:defRPr sz="1500">
+                <a:solidFill>
+                  <a:srgbClr val="1E293B"/>
+                </a:solidFill>
+              </a:defRPr>
+            </a:pPr>
+            <a:r>
+              <a:t>• 6 Cognitive Levels: Remember (1) -&gt; Understand (2) -&gt; Apply (3) -&gt; Analyze (4) -&gt; Evaluate (5) -&gt; Create (6).</a:t>
+            </a:r>
+          </a:p>
+          <a:p>
+            <a:pPr>
+              <a:spcAft>
+                <a:spcPts val="600"/>
+              </a:spcAft>
+              <a:defRPr sz="1500">
+                <a:solidFill>
+                  <a:srgbClr val="1E293B"/>
+                </a:solidFill>
+              </a:defRPr>
+            </a:pPr>
+            <a:r>
+              <a:t>• 3 Difficulty Tiers: Easy, Medium, Hard (enforcing 18 distinct cognitive complexity states).</a:t>
+            </a:r>
+          </a:p>
+          <a:p>
+            <a:pPr>
+              <a:spcAft>
+                <a:spcPts val="600"/>
+              </a:spcAft>
+              <a:defRPr b="1" sz="1600">
+                <a:solidFill>
+                  <a:srgbClr val="2563EB"/>
+                </a:solidFill>
+              </a:defRPr>
+            </a:pPr>
+            <a:r>
+              <a:t>State Machine Transition Rules:</a:t>
+            </a:r>
+          </a:p>
+          <a:p>
+            <a:pPr>
+              <a:spcAft>
+                <a:spcPts val="600"/>
+              </a:spcAft>
+              <a:defRPr sz="1500">
+                <a:solidFill>
+                  <a:srgbClr val="1E293B"/>
+                </a:solidFill>
+              </a:defRPr>
+            </a:pPr>
+            <a:r>
+              <a:t>• Score &gt;= 80% (Mastery Demonstrated):</a:t>
+            </a:r>
+          </a:p>
+          <a:p>
+            <a:pPr lvl="1">
+              <a:spcAft>
+                <a:spcPts val="400"/>
+              </a:spcAft>
+              <a:defRPr sz="1300">
+                <a:solidFill>
+                  <a:srgbClr val="1E293B"/>
+                </a:solidFill>
+              </a:defRPr>
+            </a:pPr>
+            <a:r>
+              <a:t>- Advances Bloom cognitive level (+1) or advances difficulty tier (Easy -&gt; Medium -&gt; Hard).</a:t>
+            </a:r>
+          </a:p>
+          <a:p>
+            <a:pPr lvl="1">
+              <a:spcAft>
+                <a:spcPts val="400"/>
+              </a:spcAft>
+              <a:defRPr sz="1300">
+                <a:solidFill>
+                  <a:srgbClr val="1E293B"/>
+                </a:solidFill>
+              </a:defRPr>
+            </a:pPr>
+            <a:r>
+              <a:t>- Ceiling protection: At Create (Level 6) + Hard, scores maintain maximum cognitive depth.</a:t>
+            </a:r>
+          </a:p>
+          <a:p>
+            <a:pPr>
+              <a:spcAft>
+                <a:spcPts val="600"/>
+              </a:spcAft>
+              <a:defRPr sz="1500">
+                <a:solidFill>
+                  <a:srgbClr val="1E293B"/>
+                </a:solidFill>
+              </a:defRPr>
+            </a:pPr>
+            <a:r>
+              <a:t>• Score 50% - 79% (Adequate Understanding):</a:t>
+            </a:r>
+          </a:p>
+          <a:p>
+            <a:pPr lvl="1">
+              <a:spcAft>
+                <a:spcPts val="400"/>
+              </a:spcAft>
+              <a:defRPr sz="1300">
+                <a:solidFill>
+                  <a:srgbClr val="1E293B"/>
+                </a:solidFill>
+              </a:defRPr>
+            </a:pPr>
+            <a:r>
+              <a:t>- Maintains current Bloom level and difficulty tier for concept reinforcement.</a:t>
+            </a:r>
+          </a:p>
+          <a:p>
+            <a:pPr>
+              <a:spcAft>
+                <a:spcPts val="600"/>
+              </a:spcAft>
+              <a:defRPr sz="1500">
+                <a:solidFill>
+                  <a:srgbClr val="1E293B"/>
+                </a:solidFill>
+              </a:defRPr>
+            </a:pPr>
+            <a:r>
+              <a:t>• Score &lt; 50% (Foundational Remediation):</a:t>
+            </a:r>
+          </a:p>
+          <a:p>
+            <a:pPr lvl="1">
+              <a:spcAft>
+                <a:spcPts val="400"/>
+              </a:spcAft>
+              <a:defRPr sz="1300">
+                <a:solidFill>
+                  <a:srgbClr val="1E293B"/>
+                </a:solidFill>
+              </a:defRPr>
+            </a:pPr>
+            <a:r>
+              <a:t>- Regresses Bloom cognitive level (-1) or steps down difficulty to rebuild core principles.</a:t>
+            </a:r>
+          </a:p>
+          <a:p>
+            <a:pPr lvl="1">
+              <a:spcAft>
+                <a:spcPts val="400"/>
+              </a:spcAft>
+              <a:defRPr sz="1300">
+                <a:solidFill>
+                  <a:srgbClr val="1E293B"/>
+                </a:solidFill>
+              </a:defRPr>
+            </a:pPr>
+            <a:r>
+              <a:t>- Floor protection: At Remember (Level 1) + Easy, floors cleanly without negative underflow.</a:t>
+            </a:r>
+          </a:p>
+          <a:p>
+            <a:pPr>
+              <a:spcAft>
+                <a:spcPts val="600"/>
+              </a:spcAft>
+              <a:defRPr sz="1500">
+                <a:solidFill>
+                  <a:srgbClr val="1E293B"/>
+                </a:solidFill>
+              </a:defRPr>
+            </a:pPr>
+            <a:r>
+              <a:t>• Weakness-Biased Skill Selection Algorithm:</a:t>
+            </a:r>
+          </a:p>
+          <a:p>
+            <a:pPr lvl="1">
+              <a:spcAft>
+                <a:spcPts val="400"/>
+              </a:spcAft>
+              <a:defRPr sz="1300">
+                <a:solidFill>
+                  <a:srgbClr val="1E293B"/>
+                </a:solidFill>
+              </a:defRPr>
+            </a:pPr>
+            <a:r>
+              <a:t>- Automatically samples next questions from lowest-scoring skills to eliminate competency blind spots.</a:t>
             </a:r>
           </a:p>
         </p:txBody>
@@ -4534,129 +6938,303 @@
       <p:grpSpPr/>
       <p:sp>
         <p:nvSpPr>
-          <p:cNvPr id="2" name="Title 1"/>
-          <p:cNvSpPr>
-            <a:spLocks noGrp="1"/>
-          </p:cNvSpPr>
-          <p:nvPr>
-            <p:ph type="title"/>
-          </p:nvPr>
-        </p:nvSpPr>
-        <p:spPr/>
-        <p:txBody>
-          <a:bodyPr/>
-          <a:lstStyle/>
-          <a:p>
-            <a:pPr>
-              <a:defRPr sz="2800" b="1">
+          <p:cNvPr id="2" name="TextBox 1"/>
+          <p:cNvSpPr txBox="1"/>
+          <p:nvPr/>
+        </p:nvSpPr>
+        <p:spPr>
+          <a:xfrm>
+            <a:off x="731520" y="365760"/>
+            <a:ext cx="10698480" cy="365760"/>
+          </a:xfrm>
+          <a:prstGeom prst="rect">
+            <a:avLst/>
+          </a:prstGeom>
+          <a:noFill/>
+        </p:spPr>
+        <p:txBody>
+          <a:bodyPr wrap="square">
+            <a:spAutoFit/>
+          </a:bodyPr>
+          <a:lstStyle/>
+          <a:p>
+            <a:pPr>
+              <a:defRPr sz="1000" b="1">
+                <a:solidFill>
+                  <a:srgbClr val="2563EB"/>
+                </a:solidFill>
+              </a:defRPr>
+            </a:pPr>
+            <a:r>
+              <a:t>SMARTINTERVIEW — ACADEMIC VIVA &amp; TECHNICAL DEFENSE</a:t>
+            </a:r>
+          </a:p>
+        </p:txBody>
+      </p:sp>
+      <p:sp>
+        <p:nvSpPr>
+          <p:cNvPr id="3" name="TextBox 2"/>
+          <p:cNvSpPr txBox="1"/>
+          <p:nvPr/>
+        </p:nvSpPr>
+        <p:spPr>
+          <a:xfrm>
+            <a:off x="731520" y="640080"/>
+            <a:ext cx="10698480" cy="731520"/>
+          </a:xfrm>
+          <a:prstGeom prst="rect">
+            <a:avLst/>
+          </a:prstGeom>
+          <a:noFill/>
+        </p:spPr>
+        <p:txBody>
+          <a:bodyPr wrap="square">
+            <a:spAutoFit/>
+          </a:bodyPr>
+          <a:lstStyle/>
+          <a:p>
+            <a:pPr>
+              <a:defRPr sz="2600" b="1">
                 <a:solidFill>
                   <a:srgbClr val="1A365D"/>
                 </a:solidFill>
               </a:defRPr>
             </a:pPr>
             <a:r>
-              <a:t>Voice Pipeline &amp; Comprehensive Reporting</a:t>
-            </a:r>
-          </a:p>
-        </p:txBody>
-      </p:sp>
-      <p:sp>
-        <p:nvSpPr>
-          <p:cNvPr id="3" name="Content Placeholder 2"/>
-          <p:cNvSpPr>
-            <a:spLocks noGrp="1"/>
-          </p:cNvSpPr>
-          <p:nvPr>
-            <p:ph idx="1"/>
-          </p:nvPr>
-        </p:nvSpPr>
-        <p:spPr/>
-        <p:txBody>
-          <a:bodyPr wrap="square"/>
-          <a:lstStyle/>
-          <a:p>
-            <a:pPr>
-              <a:spcAft>
-                <a:spcPts val="800"/>
-              </a:spcAft>
-              <a:defRPr b="1" sz="1800">
-                <a:solidFill>
-                  <a:srgbClr val="2B6CB0"/>
-                </a:solidFill>
-              </a:defRPr>
-            </a:pPr>
-            <a:r>
-              <a:t>Low-Latency Spoken Dialogue Pipeline:</a:t>
-            </a:r>
-          </a:p>
-          <a:p>
-            <a:pPr>
-              <a:spcAft>
-                <a:spcPts val="600"/>
-              </a:spcAft>
-              <a:defRPr sz="1700"/>
-            </a:pPr>
-            <a:r>
-              <a:t>• Two-Way Audio: Whisper Large-v3 STT (Groq) + Microsoft Edge-TTS (en-US-ChristopherNeural).</a:t>
-            </a:r>
-          </a:p>
-          <a:p>
-            <a:pPr>
-              <a:spcAft>
-                <a:spcPts val="600"/>
-              </a:spcAft>
-              <a:defRPr sz="1700"/>
-            </a:pPr>
-            <a:r>
-              <a:t>• Voice Synthesis Latency &lt;= 1.2s: In-memory io.BytesIO streaming (zero disk footprint).</a:t>
-            </a:r>
-          </a:p>
-          <a:p>
-            <a:pPr>
-              <a:spcAft>
-                <a:spcPts val="600"/>
-              </a:spcAft>
-              <a:defRPr sz="1700"/>
-            </a:pPr>
-            <a:r>
-              <a:t>• End-to-End Turnaround &lt; 2.5s: Prevents conversational dead air during mock interviews.</a:t>
-            </a:r>
-          </a:p>
-          <a:p>
-            <a:pPr>
-              <a:spcAft>
-                <a:spcPts val="800"/>
-              </a:spcAft>
-              <a:defRPr b="1" sz="1800">
-                <a:solidFill>
-                  <a:srgbClr val="2B6CB0"/>
-                </a:solidFill>
-              </a:defRPr>
-            </a:pPr>
-            <a:r>
-              <a:t>Diagnostic Performance Reporting:</a:t>
-            </a:r>
-          </a:p>
-          <a:p>
-            <a:pPr>
-              <a:spcAft>
-                <a:spcPts val="600"/>
-              </a:spcAft>
-              <a:defRPr sz="1700"/>
-            </a:pPr>
-            <a:r>
-              <a:t>• Real-time React dashboard with 5-axis competency radar chart &amp; Bloom level progression.</a:t>
-            </a:r>
-          </a:p>
-          <a:p>
-            <a:pPr>
-              <a:spcAft>
-                <a:spcPts val="600"/>
-              </a:spcAft>
-              <a:defRPr sz="1700"/>
-            </a:pPr>
-            <a:r>
-              <a:t>• Downloadable ReportLab PDF: Detailed question transcripts, skill heatmaps, and personalized upskilling roadmaps.</a:t>
+              <a:t>Multi-Signal Answer Evaluation (Eliminating 'Vibe Grading')</a:t>
+            </a:r>
+          </a:p>
+        </p:txBody>
+      </p:sp>
+      <p:sp>
+        <p:nvSpPr>
+          <p:cNvPr id="4" name="TextBox 3"/>
+          <p:cNvSpPr txBox="1"/>
+          <p:nvPr/>
+        </p:nvSpPr>
+        <p:spPr>
+          <a:xfrm>
+            <a:off x="731520" y="1371600"/>
+            <a:ext cx="10698480" cy="5029200"/>
+          </a:xfrm>
+          <a:prstGeom prst="rect">
+            <a:avLst/>
+          </a:prstGeom>
+          <a:noFill/>
+        </p:spPr>
+        <p:txBody>
+          <a:bodyPr wrap="square">
+            <a:spAutoFit/>
+          </a:bodyPr>
+          <a:lstStyle/>
+          <a:p>
+            <a:pPr>
+              <a:spcAft>
+                <a:spcPts val="600"/>
+              </a:spcAft>
+              <a:defRPr b="1" sz="1600">
+                <a:solidFill>
+                  <a:srgbClr val="2563EB"/>
+                </a:solidFill>
+              </a:defRPr>
+            </a:pPr>
+            <a:r>
+              <a:t>Objective 5-Part Mathematical Scoring Rubric:</a:t>
+            </a:r>
+          </a:p>
+          <a:p>
+            <a:pPr>
+              <a:spcAft>
+                <a:spcPts val="600"/>
+              </a:spcAft>
+              <a:defRPr sz="1500">
+                <a:solidFill>
+                  <a:srgbClr val="1E293B"/>
+                </a:solidFill>
+              </a:defRPr>
+            </a:pPr>
+            <a:r>
+              <a:t>• 1. Technical Correctness (30% Weight):</a:t>
+            </a:r>
+          </a:p>
+          <a:p>
+            <a:pPr lvl="1">
+              <a:spcAft>
+                <a:spcPts val="400"/>
+              </a:spcAft>
+              <a:defRPr sz="1300">
+                <a:solidFill>
+                  <a:srgbClr val="1E293B"/>
+                </a:solidFill>
+              </a:defRPr>
+            </a:pPr>
+            <a:r>
+              <a:t>- LLM logical reasoning and factual accuracy verified against retrieved ground truth.</a:t>
+            </a:r>
+          </a:p>
+          <a:p>
+            <a:pPr>
+              <a:spcAft>
+                <a:spcPts val="600"/>
+              </a:spcAft>
+              <a:defRPr sz="1500">
+                <a:solidFill>
+                  <a:srgbClr val="1E293B"/>
+                </a:solidFill>
+              </a:defRPr>
+            </a:pPr>
+            <a:r>
+              <a:t>• 2. Completeness (20% Weight):</a:t>
+            </a:r>
+          </a:p>
+          <a:p>
+            <a:pPr lvl="1">
+              <a:spcAft>
+                <a:spcPts val="400"/>
+              </a:spcAft>
+              <a:defRPr sz="1300">
+                <a:solidFill>
+                  <a:srgbClr val="1E293B"/>
+                </a:solidFill>
+              </a:defRPr>
+            </a:pPr>
+            <a:r>
+              <a:t>- Coverage of all required problem constraints, trade-offs, and edge cases.</a:t>
+            </a:r>
+          </a:p>
+          <a:p>
+            <a:pPr>
+              <a:spcAft>
+                <a:spcPts val="600"/>
+              </a:spcAft>
+              <a:defRPr sz="1500">
+                <a:solidFill>
+                  <a:srgbClr val="1E293B"/>
+                </a:solidFill>
+              </a:defRPr>
+            </a:pPr>
+            <a:r>
+              <a:t>• 3. Relevance (20% Weight):</a:t>
+            </a:r>
+          </a:p>
+          <a:p>
+            <a:pPr lvl="1">
+              <a:spcAft>
+                <a:spcPts val="400"/>
+              </a:spcAft>
+              <a:defRPr sz="1300">
+                <a:solidFill>
+                  <a:srgbClr val="1E293B"/>
+                </a:solidFill>
+              </a:defRPr>
+            </a:pPr>
+            <a:r>
+              <a:t>- Directness, architectural focus, and absence of conversational filler rhetoric.</a:t>
+            </a:r>
+          </a:p>
+          <a:p>
+            <a:pPr>
+              <a:spcAft>
+                <a:spcPts val="600"/>
+              </a:spcAft>
+              <a:defRPr sz="1500">
+                <a:solidFill>
+                  <a:srgbClr val="1E293B"/>
+                </a:solidFill>
+              </a:defRPr>
+            </a:pPr>
+            <a:r>
+              <a:t>• 4. Semantic Cosine Similarity (15% Weight):</a:t>
+            </a:r>
+          </a:p>
+          <a:p>
+            <a:pPr lvl="1">
+              <a:spcAft>
+                <a:spcPts val="400"/>
+              </a:spcAft>
+              <a:defRPr sz="1300">
+                <a:solidFill>
+                  <a:srgbClr val="1E293B"/>
+                </a:solidFill>
+              </a:defRPr>
+            </a:pPr>
+            <a:r>
+              <a:t>- S-BERT (all-MiniLM-L6-v2) cosine distance between candidate answer and ground-truth chunk.</a:t>
+            </a:r>
+          </a:p>
+          <a:p>
+            <a:pPr>
+              <a:spcAft>
+                <a:spcPts val="600"/>
+              </a:spcAft>
+              <a:defRPr sz="1500">
+                <a:solidFill>
+                  <a:srgbClr val="1E293B"/>
+                </a:solidFill>
+              </a:defRPr>
+            </a:pPr>
+            <a:r>
+              <a:t>• 5. Explicit Concept Coverage (15% Weight):</a:t>
+            </a:r>
+          </a:p>
+          <a:p>
+            <a:pPr lvl="1">
+              <a:spcAft>
+                <a:spcPts val="400"/>
+              </a:spcAft>
+              <a:defRPr sz="1300">
+                <a:solidFill>
+                  <a:srgbClr val="1E293B"/>
+                </a:solidFill>
+              </a:defRPr>
+            </a:pPr>
+            <a:r>
+              <a:t>- Deterministic keyword and entity regex matching for mandatory technical concepts.</a:t>
+            </a:r>
+          </a:p>
+          <a:p>
+            <a:pPr>
+              <a:spcAft>
+                <a:spcPts val="500"/>
+              </a:spcAft>
+              <a:defRPr sz="1400">
+                <a:solidFill>
+                  <a:srgbClr val="1E293B"/>
+                </a:solidFill>
+              </a:defRPr>
+            </a:pPr>
+            <a:r>
+              <a:t>Why This Multi-Signal Formula?</a:t>
+            </a:r>
+          </a:p>
+          <a:p>
+            <a:pPr>
+              <a:spcAft>
+                <a:spcPts val="600"/>
+              </a:spcAft>
+              <a:defRPr sz="1500">
+                <a:solidFill>
+                  <a:srgbClr val="1E293B"/>
+                </a:solidFill>
+              </a:defRPr>
+            </a:pPr>
+            <a:r>
+              <a:t>• Zero subjectivity: Same answer yields identical, reproducible scores across repeated runs.</a:t>
+            </a:r>
+          </a:p>
+          <a:p>
+            <a:pPr>
+              <a:spcAft>
+                <a:spcPts val="600"/>
+              </a:spcAft>
+              <a:defRPr sz="1500">
+                <a:solidFill>
+                  <a:srgbClr val="1E293B"/>
+                </a:solidFill>
+              </a:defRPr>
+            </a:pPr>
+            <a:r>
+              <a:t>• Penalizes confident but factually incorrect responses that fool standard LLM judges.</a:t>
             </a:r>
           </a:p>
         </p:txBody>
